--- a/Lessons/Lesson 6 Data Structures_ Objects and Arrays.pptx
+++ b/Lessons/Lesson 6 Data Structures_ Objects and Arrays.pptx
@@ -2,40 +2,41 @@
 <file path=ppt/presentation.xml><?xml version="1.0" encoding="utf-8"?>
 <p:presentation xmlns:a="http://schemas.openxmlformats.org/drawingml/2006/main" xmlns:r="http://schemas.openxmlformats.org/officeDocument/2006/relationships" xmlns:p="http://schemas.openxmlformats.org/presentationml/2006/main" strictFirstAndLastChars="0" embedTrueTypeFonts="1" saveSubsetFonts="1" autoCompressPictures="0">
   <p:sldMasterIdLst>
-    <p:sldMasterId id="2147483659" r:id="rId1"/>
+    <p:sldMasterId id="2147483648" r:id="rId1"/>
   </p:sldMasterIdLst>
   <p:notesMasterIdLst>
-    <p:notesMasterId r:id="rId13"/>
+    <p:notesMasterId r:id="rId4"/>
   </p:notesMasterIdLst>
   <p:sldIdLst>
-    <p:sldId id="256" r:id="rId2"/>
-    <p:sldId id="257" r:id="rId3"/>
-    <p:sldId id="258" r:id="rId4"/>
-    <p:sldId id="259" r:id="rId5"/>
-    <p:sldId id="260" r:id="rId6"/>
-    <p:sldId id="261" r:id="rId7"/>
-    <p:sldId id="262" r:id="rId8"/>
-    <p:sldId id="263" r:id="rId9"/>
-    <p:sldId id="264" r:id="rId10"/>
-    <p:sldId id="266" r:id="rId11"/>
-    <p:sldId id="265" r:id="rId12"/>
+    <p:sldId id="256" r:id="rId3"/>
+    <p:sldId id="257" r:id="rId5"/>
+    <p:sldId id="258" r:id="rId6"/>
+    <p:sldId id="259" r:id="rId7"/>
+    <p:sldId id="267" r:id="rId8"/>
+    <p:sldId id="260" r:id="rId9"/>
+    <p:sldId id="261" r:id="rId10"/>
+    <p:sldId id="262" r:id="rId11"/>
+    <p:sldId id="263" r:id="rId12"/>
+    <p:sldId id="264" r:id="rId13"/>
+    <p:sldId id="266" r:id="rId14"/>
+    <p:sldId id="265" r:id="rId15"/>
   </p:sldIdLst>
   <p:sldSz cx="9144000" cy="5143500" type="screen16x9"/>
   <p:notesSz cx="6858000" cy="9144000"/>
   <p:embeddedFontLst>
     <p:embeddedFont>
-      <p:font typeface="Lato" panose="020B0604020202020204" charset="0"/>
-      <p:regular r:id="rId14"/>
-      <p:bold r:id="rId15"/>
-      <p:italic r:id="rId16"/>
-      <p:boldItalic r:id="rId17"/>
+      <p:font typeface="Raleway"/>
+      <p:regular r:id="rId19"/>
+      <p:bold r:id="rId20"/>
+      <p:italic r:id="rId21"/>
+      <p:boldItalic r:id="rId22"/>
     </p:embeddedFont>
     <p:embeddedFont>
-      <p:font typeface="Raleway" panose="020B0604020202020204" charset="-52"/>
-      <p:regular r:id="rId18"/>
-      <p:bold r:id="rId19"/>
-      <p:italic r:id="rId20"/>
-      <p:boldItalic r:id="rId21"/>
+      <p:font typeface="Lato" panose="020F0502020204030203"/>
+      <p:regular r:id="rId23"/>
+      <p:bold r:id="rId24"/>
+      <p:italic r:id="rId25"/>
+      <p:boldItalic r:id="rId26"/>
     </p:embeddedFont>
   </p:embeddedFontLst>
   <p:defaultTextStyle>
@@ -63,15 +64,15 @@
       <a:buClr>
         <a:srgbClr val="000000"/>
       </a:buClr>
-      <a:buFont typeface="Arial"/>
+      <a:buFont typeface="Arial" panose="020B0604020202020204"/>
       <a:defRPr sz="1400" b="0" i="0" u="none" strike="noStrike" cap="none">
         <a:solidFill>
           <a:srgbClr val="000000"/>
         </a:solidFill>
-        <a:latin typeface="Arial"/>
-        <a:ea typeface="Arial"/>
-        <a:cs typeface="Arial"/>
-        <a:sym typeface="Arial"/>
+        <a:latin typeface="Arial" panose="020B0604020202020204"/>
+        <a:ea typeface="Arial" panose="020B0604020202020204"/>
+        <a:cs typeface="Arial" panose="020B0604020202020204"/>
+        <a:sym typeface="Arial" panose="020B0604020202020204"/>
       </a:defRPr>
     </a:lvl1pPr>
     <a:lvl2pPr marR="0" lvl="1" algn="l" rtl="0">
@@ -87,15 +88,15 @@
       <a:buClr>
         <a:srgbClr val="000000"/>
       </a:buClr>
-      <a:buFont typeface="Arial"/>
+      <a:buFont typeface="Arial" panose="020B0604020202020204"/>
       <a:defRPr sz="1400" b="0" i="0" u="none" strike="noStrike" cap="none">
         <a:solidFill>
           <a:srgbClr val="000000"/>
         </a:solidFill>
-        <a:latin typeface="Arial"/>
-        <a:ea typeface="Arial"/>
-        <a:cs typeface="Arial"/>
-        <a:sym typeface="Arial"/>
+        <a:latin typeface="Arial" panose="020B0604020202020204"/>
+        <a:ea typeface="Arial" panose="020B0604020202020204"/>
+        <a:cs typeface="Arial" panose="020B0604020202020204"/>
+        <a:sym typeface="Arial" panose="020B0604020202020204"/>
       </a:defRPr>
     </a:lvl2pPr>
     <a:lvl3pPr marR="0" lvl="2" algn="l" rtl="0">
@@ -111,15 +112,15 @@
       <a:buClr>
         <a:srgbClr val="000000"/>
       </a:buClr>
-      <a:buFont typeface="Arial"/>
+      <a:buFont typeface="Arial" panose="020B0604020202020204"/>
       <a:defRPr sz="1400" b="0" i="0" u="none" strike="noStrike" cap="none">
         <a:solidFill>
           <a:srgbClr val="000000"/>
         </a:solidFill>
-        <a:latin typeface="Arial"/>
-        <a:ea typeface="Arial"/>
-        <a:cs typeface="Arial"/>
-        <a:sym typeface="Arial"/>
+        <a:latin typeface="Arial" panose="020B0604020202020204"/>
+        <a:ea typeface="Arial" panose="020B0604020202020204"/>
+        <a:cs typeface="Arial" panose="020B0604020202020204"/>
+        <a:sym typeface="Arial" panose="020B0604020202020204"/>
       </a:defRPr>
     </a:lvl3pPr>
     <a:lvl4pPr marR="0" lvl="3" algn="l" rtl="0">
@@ -135,15 +136,15 @@
       <a:buClr>
         <a:srgbClr val="000000"/>
       </a:buClr>
-      <a:buFont typeface="Arial"/>
+      <a:buFont typeface="Arial" panose="020B0604020202020204"/>
       <a:defRPr sz="1400" b="0" i="0" u="none" strike="noStrike" cap="none">
         <a:solidFill>
           <a:srgbClr val="000000"/>
         </a:solidFill>
-        <a:latin typeface="Arial"/>
-        <a:ea typeface="Arial"/>
-        <a:cs typeface="Arial"/>
-        <a:sym typeface="Arial"/>
+        <a:latin typeface="Arial" panose="020B0604020202020204"/>
+        <a:ea typeface="Arial" panose="020B0604020202020204"/>
+        <a:cs typeface="Arial" panose="020B0604020202020204"/>
+        <a:sym typeface="Arial" panose="020B0604020202020204"/>
       </a:defRPr>
     </a:lvl4pPr>
     <a:lvl5pPr marR="0" lvl="4" algn="l" rtl="0">
@@ -159,15 +160,15 @@
       <a:buClr>
         <a:srgbClr val="000000"/>
       </a:buClr>
-      <a:buFont typeface="Arial"/>
+      <a:buFont typeface="Arial" panose="020B0604020202020204"/>
       <a:defRPr sz="1400" b="0" i="0" u="none" strike="noStrike" cap="none">
         <a:solidFill>
           <a:srgbClr val="000000"/>
         </a:solidFill>
-        <a:latin typeface="Arial"/>
-        <a:ea typeface="Arial"/>
-        <a:cs typeface="Arial"/>
-        <a:sym typeface="Arial"/>
+        <a:latin typeface="Arial" panose="020B0604020202020204"/>
+        <a:ea typeface="Arial" panose="020B0604020202020204"/>
+        <a:cs typeface="Arial" panose="020B0604020202020204"/>
+        <a:sym typeface="Arial" panose="020B0604020202020204"/>
       </a:defRPr>
     </a:lvl5pPr>
     <a:lvl6pPr marR="0" lvl="5" algn="l" rtl="0">
@@ -183,15 +184,15 @@
       <a:buClr>
         <a:srgbClr val="000000"/>
       </a:buClr>
-      <a:buFont typeface="Arial"/>
+      <a:buFont typeface="Arial" panose="020B0604020202020204"/>
       <a:defRPr sz="1400" b="0" i="0" u="none" strike="noStrike" cap="none">
         <a:solidFill>
           <a:srgbClr val="000000"/>
         </a:solidFill>
-        <a:latin typeface="Arial"/>
-        <a:ea typeface="Arial"/>
-        <a:cs typeface="Arial"/>
-        <a:sym typeface="Arial"/>
+        <a:latin typeface="Arial" panose="020B0604020202020204"/>
+        <a:ea typeface="Arial" panose="020B0604020202020204"/>
+        <a:cs typeface="Arial" panose="020B0604020202020204"/>
+        <a:sym typeface="Arial" panose="020B0604020202020204"/>
       </a:defRPr>
     </a:lvl6pPr>
     <a:lvl7pPr marR="0" lvl="6" algn="l" rtl="0">
@@ -207,15 +208,15 @@
       <a:buClr>
         <a:srgbClr val="000000"/>
       </a:buClr>
-      <a:buFont typeface="Arial"/>
+      <a:buFont typeface="Arial" panose="020B0604020202020204"/>
       <a:defRPr sz="1400" b="0" i="0" u="none" strike="noStrike" cap="none">
         <a:solidFill>
           <a:srgbClr val="000000"/>
         </a:solidFill>
-        <a:latin typeface="Arial"/>
-        <a:ea typeface="Arial"/>
-        <a:cs typeface="Arial"/>
-        <a:sym typeface="Arial"/>
+        <a:latin typeface="Arial" panose="020B0604020202020204"/>
+        <a:ea typeface="Arial" panose="020B0604020202020204"/>
+        <a:cs typeface="Arial" panose="020B0604020202020204"/>
+        <a:sym typeface="Arial" panose="020B0604020202020204"/>
       </a:defRPr>
     </a:lvl7pPr>
     <a:lvl8pPr marR="0" lvl="7" algn="l" rtl="0">
@@ -231,15 +232,15 @@
       <a:buClr>
         <a:srgbClr val="000000"/>
       </a:buClr>
-      <a:buFont typeface="Arial"/>
+      <a:buFont typeface="Arial" panose="020B0604020202020204"/>
       <a:defRPr sz="1400" b="0" i="0" u="none" strike="noStrike" cap="none">
         <a:solidFill>
           <a:srgbClr val="000000"/>
         </a:solidFill>
-        <a:latin typeface="Arial"/>
-        <a:ea typeface="Arial"/>
-        <a:cs typeface="Arial"/>
-        <a:sym typeface="Arial"/>
+        <a:latin typeface="Arial" panose="020B0604020202020204"/>
+        <a:ea typeface="Arial" panose="020B0604020202020204"/>
+        <a:cs typeface="Arial" panose="020B0604020202020204"/>
+        <a:sym typeface="Arial" panose="020B0604020202020204"/>
       </a:defRPr>
     </a:lvl8pPr>
     <a:lvl9pPr marR="0" lvl="8" algn="l" rtl="0">
@@ -255,27 +256,27 @@
       <a:buClr>
         <a:srgbClr val="000000"/>
       </a:buClr>
-      <a:buFont typeface="Arial"/>
+      <a:buFont typeface="Arial" panose="020B0604020202020204"/>
       <a:defRPr sz="1400" b="0" i="0" u="none" strike="noStrike" cap="none">
         <a:solidFill>
           <a:srgbClr val="000000"/>
         </a:solidFill>
-        <a:latin typeface="Arial"/>
-        <a:ea typeface="Arial"/>
-        <a:cs typeface="Arial"/>
-        <a:sym typeface="Arial"/>
+        <a:latin typeface="Arial" panose="020B0604020202020204"/>
+        <a:ea typeface="Arial" panose="020B0604020202020204"/>
+        <a:cs typeface="Arial" panose="020B0604020202020204"/>
+        <a:sym typeface="Arial" panose="020B0604020202020204"/>
       </a:defRPr>
     </a:lvl9pPr>
   </p:defaultTextStyle>
   <p:extLst>
     <p:ext uri="{EFAFB233-063F-42B5-8137-9DF3F51BA10A}">
       <p15:sldGuideLst xmlns:p15="http://schemas.microsoft.com/office/powerpoint/2012/main">
-        <p15:guide id="1" orient="horz" pos="1620">
+        <p15:guide id="1" orient="horz" pos="1620" userDrawn="1">
           <p15:clr>
             <a:srgbClr val="747775"/>
           </p15:clr>
         </p15:guide>
-        <p15:guide id="2" pos="2880">
+        <p15:guide id="2" pos="2880" userDrawn="1">
           <p15:clr>
             <a:srgbClr val="747775"/>
           </p15:clr>
@@ -284,88 +285,6 @@
     </p:ext>
   </p:extLst>
 </p:presentation>
-</file>
-
-<file path=ppt/changesInfos/changesInfo1.xml><?xml version="1.0" encoding="utf-8"?>
-<pc:chgInfo xmlns:a="http://schemas.openxmlformats.org/drawingml/2006/main" xmlns:r="http://schemas.openxmlformats.org/officeDocument/2006/relationships" xmlns:ac="http://schemas.microsoft.com/office/drawing/2013/main/command" xmlns:pc="http://schemas.microsoft.com/office/powerpoint/2013/main/command">
-  <pc:docChgLst>
-    <pc:chgData name="1.0 Programming" userId="d9944a5f9a1f43e9" providerId="LiveId" clId="{4871605C-2686-483E-AC0F-F4C5C495880D}"/>
-    <pc:docChg chg="custSel addSld modSld">
-      <pc:chgData name="1.0 Programming" userId="d9944a5f9a1f43e9" providerId="LiveId" clId="{4871605C-2686-483E-AC0F-F4C5C495880D}" dt="2024-09-23T08:24:56.159" v="6" actId="27636"/>
-      <pc:docMkLst>
-        <pc:docMk/>
-      </pc:docMkLst>
-      <pc:sldChg chg="modSp">
-        <pc:chgData name="1.0 Programming" userId="d9944a5f9a1f43e9" providerId="LiveId" clId="{4871605C-2686-483E-AC0F-F4C5C495880D}" dt="2024-09-23T08:24:56.075" v="5" actId="27636"/>
-        <pc:sldMkLst>
-          <pc:docMk/>
-          <pc:sldMk cId="0" sldId="261"/>
-        </pc:sldMkLst>
-        <pc:spChg chg="mod">
-          <ac:chgData name="1.0 Programming" userId="d9944a5f9a1f43e9" providerId="LiveId" clId="{4871605C-2686-483E-AC0F-F4C5C495880D}" dt="2024-09-23T08:24:56.075" v="5" actId="27636"/>
-          <ac:spMkLst>
-            <pc:docMk/>
-            <pc:sldMk cId="0" sldId="261"/>
-            <ac:spMk id="117" creationId="{00000000-0000-0000-0000-000000000000}"/>
-          </ac:spMkLst>
-        </pc:spChg>
-      </pc:sldChg>
-      <pc:sldChg chg="modSp">
-        <pc:chgData name="1.0 Programming" userId="d9944a5f9a1f43e9" providerId="LiveId" clId="{4871605C-2686-483E-AC0F-F4C5C495880D}" dt="2024-09-23T08:24:56.159" v="6" actId="27636"/>
-        <pc:sldMkLst>
-          <pc:docMk/>
-          <pc:sldMk cId="0" sldId="263"/>
-        </pc:sldMkLst>
-        <pc:spChg chg="mod">
-          <ac:chgData name="1.0 Programming" userId="d9944a5f9a1f43e9" providerId="LiveId" clId="{4871605C-2686-483E-AC0F-F4C5C495880D}" dt="2024-09-23T08:24:56.159" v="6" actId="27636"/>
-          <ac:spMkLst>
-            <pc:docMk/>
-            <pc:sldMk cId="0" sldId="263"/>
-            <ac:spMk id="129" creationId="{00000000-0000-0000-0000-000000000000}"/>
-          </ac:spMkLst>
-        </pc:spChg>
-      </pc:sldChg>
-      <pc:sldChg chg="modSp">
-        <pc:chgData name="1.0 Programming" userId="d9944a5f9a1f43e9" providerId="LiveId" clId="{4871605C-2686-483E-AC0F-F4C5C495880D}" dt="2024-09-23T08:24:55.975" v="4" actId="27636"/>
-        <pc:sldMkLst>
-          <pc:docMk/>
-          <pc:sldMk cId="0" sldId="265"/>
-        </pc:sldMkLst>
-        <pc:spChg chg="mod">
-          <ac:chgData name="1.0 Programming" userId="d9944a5f9a1f43e9" providerId="LiveId" clId="{4871605C-2686-483E-AC0F-F4C5C495880D}" dt="2024-09-23T08:24:55.975" v="4" actId="27636"/>
-          <ac:spMkLst>
-            <pc:docMk/>
-            <pc:sldMk cId="0" sldId="265"/>
-            <ac:spMk id="141" creationId="{00000000-0000-0000-0000-000000000000}"/>
-          </ac:spMkLst>
-        </pc:spChg>
-      </pc:sldChg>
-      <pc:sldChg chg="modSp new add">
-        <pc:chgData name="1.0 Programming" userId="d9944a5f9a1f43e9" providerId="LiveId" clId="{4871605C-2686-483E-AC0F-F4C5C495880D}" dt="2024-09-23T08:24:55.906" v="3" actId="27636"/>
-        <pc:sldMkLst>
-          <pc:docMk/>
-          <pc:sldMk cId="3237577864" sldId="266"/>
-        </pc:sldMkLst>
-        <pc:spChg chg="mod">
-          <ac:chgData name="1.0 Programming" userId="d9944a5f9a1f43e9" providerId="LiveId" clId="{4871605C-2686-483E-AC0F-F4C5C495880D}" dt="2024-09-23T08:24:55.906" v="3" actId="27636"/>
-          <ac:spMkLst>
-            <pc:docMk/>
-            <pc:sldMk cId="3237577864" sldId="266"/>
-            <ac:spMk id="2" creationId="{D9C913A5-184A-415F-93BF-88316C2D5FF1}"/>
-          </ac:spMkLst>
-        </pc:spChg>
-        <pc:spChg chg="mod">
-          <ac:chgData name="1.0 Programming" userId="d9944a5f9a1f43e9" providerId="LiveId" clId="{4871605C-2686-483E-AC0F-F4C5C495880D}" dt="2024-09-23T08:24:55.859" v="2"/>
-          <ac:spMkLst>
-            <pc:docMk/>
-            <pc:sldMk cId="3237577864" sldId="266"/>
-            <ac:spMk id="3" creationId="{FD54C728-BEE9-4EC5-90FB-5A9944C12D09}"/>
-          </ac:spMkLst>
-        </pc:spChg>
-      </pc:sldChg>
-    </pc:docChg>
-  </pc:docChgLst>
-</pc:chgInfo>
 </file>
 
 <file path=ppt/notesMasters/notesMaster1.xml><?xml version="1.0" encoding="utf-8"?>
@@ -569,9 +488,7 @@
               <a:defRPr sz="1100"/>
             </a:lvl9pPr>
           </a:lstStyle>
-          <a:p>
-            <a:endParaRPr/>
-          </a:p>
+          <a:p/>
         </p:txBody>
       </p:sp>
     </p:spTree>
@@ -602,15 +519,15 @@
       <a:buClr>
         <a:srgbClr val="000000"/>
       </a:buClr>
-      <a:buFont typeface="Arial"/>
+      <a:buFont typeface="Arial" panose="020B0604020202020204"/>
       <a:defRPr sz="1400" b="0" i="0" u="none" strike="noStrike" cap="none">
         <a:solidFill>
           <a:srgbClr val="000000"/>
         </a:solidFill>
-        <a:latin typeface="Arial"/>
-        <a:ea typeface="Arial"/>
-        <a:cs typeface="Arial"/>
-        <a:sym typeface="Arial"/>
+        <a:latin typeface="Arial" panose="020B0604020202020204"/>
+        <a:ea typeface="Arial" panose="020B0604020202020204"/>
+        <a:cs typeface="Arial" panose="020B0604020202020204"/>
+        <a:sym typeface="Arial" panose="020B0604020202020204"/>
       </a:defRPr>
     </a:lvl1pPr>
     <a:lvl2pPr marR="0" lvl="1" algn="l" rtl="0">
@@ -626,15 +543,15 @@
       <a:buClr>
         <a:srgbClr val="000000"/>
       </a:buClr>
-      <a:buFont typeface="Arial"/>
+      <a:buFont typeface="Arial" panose="020B0604020202020204"/>
       <a:defRPr sz="1400" b="0" i="0" u="none" strike="noStrike" cap="none">
         <a:solidFill>
           <a:srgbClr val="000000"/>
         </a:solidFill>
-        <a:latin typeface="Arial"/>
-        <a:ea typeface="Arial"/>
-        <a:cs typeface="Arial"/>
-        <a:sym typeface="Arial"/>
+        <a:latin typeface="Arial" panose="020B0604020202020204"/>
+        <a:ea typeface="Arial" panose="020B0604020202020204"/>
+        <a:cs typeface="Arial" panose="020B0604020202020204"/>
+        <a:sym typeface="Arial" panose="020B0604020202020204"/>
       </a:defRPr>
     </a:lvl2pPr>
     <a:lvl3pPr marR="0" lvl="2" algn="l" rtl="0">
@@ -650,15 +567,15 @@
       <a:buClr>
         <a:srgbClr val="000000"/>
       </a:buClr>
-      <a:buFont typeface="Arial"/>
+      <a:buFont typeface="Arial" panose="020B0604020202020204"/>
       <a:defRPr sz="1400" b="0" i="0" u="none" strike="noStrike" cap="none">
         <a:solidFill>
           <a:srgbClr val="000000"/>
         </a:solidFill>
-        <a:latin typeface="Arial"/>
-        <a:ea typeface="Arial"/>
-        <a:cs typeface="Arial"/>
-        <a:sym typeface="Arial"/>
+        <a:latin typeface="Arial" panose="020B0604020202020204"/>
+        <a:ea typeface="Arial" panose="020B0604020202020204"/>
+        <a:cs typeface="Arial" panose="020B0604020202020204"/>
+        <a:sym typeface="Arial" panose="020B0604020202020204"/>
       </a:defRPr>
     </a:lvl3pPr>
     <a:lvl4pPr marR="0" lvl="3" algn="l" rtl="0">
@@ -674,15 +591,15 @@
       <a:buClr>
         <a:srgbClr val="000000"/>
       </a:buClr>
-      <a:buFont typeface="Arial"/>
+      <a:buFont typeface="Arial" panose="020B0604020202020204"/>
       <a:defRPr sz="1400" b="0" i="0" u="none" strike="noStrike" cap="none">
         <a:solidFill>
           <a:srgbClr val="000000"/>
         </a:solidFill>
-        <a:latin typeface="Arial"/>
-        <a:ea typeface="Arial"/>
-        <a:cs typeface="Arial"/>
-        <a:sym typeface="Arial"/>
+        <a:latin typeface="Arial" panose="020B0604020202020204"/>
+        <a:ea typeface="Arial" panose="020B0604020202020204"/>
+        <a:cs typeface="Arial" panose="020B0604020202020204"/>
+        <a:sym typeface="Arial" panose="020B0604020202020204"/>
       </a:defRPr>
     </a:lvl4pPr>
     <a:lvl5pPr marR="0" lvl="4" algn="l" rtl="0">
@@ -698,15 +615,15 @@
       <a:buClr>
         <a:srgbClr val="000000"/>
       </a:buClr>
-      <a:buFont typeface="Arial"/>
+      <a:buFont typeface="Arial" panose="020B0604020202020204"/>
       <a:defRPr sz="1400" b="0" i="0" u="none" strike="noStrike" cap="none">
         <a:solidFill>
           <a:srgbClr val="000000"/>
         </a:solidFill>
-        <a:latin typeface="Arial"/>
-        <a:ea typeface="Arial"/>
-        <a:cs typeface="Arial"/>
-        <a:sym typeface="Arial"/>
+        <a:latin typeface="Arial" panose="020B0604020202020204"/>
+        <a:ea typeface="Arial" panose="020B0604020202020204"/>
+        <a:cs typeface="Arial" panose="020B0604020202020204"/>
+        <a:sym typeface="Arial" panose="020B0604020202020204"/>
       </a:defRPr>
     </a:lvl5pPr>
     <a:lvl6pPr marR="0" lvl="5" algn="l" rtl="0">
@@ -722,15 +639,15 @@
       <a:buClr>
         <a:srgbClr val="000000"/>
       </a:buClr>
-      <a:buFont typeface="Arial"/>
+      <a:buFont typeface="Arial" panose="020B0604020202020204"/>
       <a:defRPr sz="1400" b="0" i="0" u="none" strike="noStrike" cap="none">
         <a:solidFill>
           <a:srgbClr val="000000"/>
         </a:solidFill>
-        <a:latin typeface="Arial"/>
-        <a:ea typeface="Arial"/>
-        <a:cs typeface="Arial"/>
-        <a:sym typeface="Arial"/>
+        <a:latin typeface="Arial" panose="020B0604020202020204"/>
+        <a:ea typeface="Arial" panose="020B0604020202020204"/>
+        <a:cs typeface="Arial" panose="020B0604020202020204"/>
+        <a:sym typeface="Arial" panose="020B0604020202020204"/>
       </a:defRPr>
     </a:lvl6pPr>
     <a:lvl7pPr marR="0" lvl="6" algn="l" rtl="0">
@@ -746,15 +663,15 @@
       <a:buClr>
         <a:srgbClr val="000000"/>
       </a:buClr>
-      <a:buFont typeface="Arial"/>
+      <a:buFont typeface="Arial" panose="020B0604020202020204"/>
       <a:defRPr sz="1400" b="0" i="0" u="none" strike="noStrike" cap="none">
         <a:solidFill>
           <a:srgbClr val="000000"/>
         </a:solidFill>
-        <a:latin typeface="Arial"/>
-        <a:ea typeface="Arial"/>
-        <a:cs typeface="Arial"/>
-        <a:sym typeface="Arial"/>
+        <a:latin typeface="Arial" panose="020B0604020202020204"/>
+        <a:ea typeface="Arial" panose="020B0604020202020204"/>
+        <a:cs typeface="Arial" panose="020B0604020202020204"/>
+        <a:sym typeface="Arial" panose="020B0604020202020204"/>
       </a:defRPr>
     </a:lvl7pPr>
     <a:lvl8pPr marR="0" lvl="7" algn="l" rtl="0">
@@ -770,15 +687,15 @@
       <a:buClr>
         <a:srgbClr val="000000"/>
       </a:buClr>
-      <a:buFont typeface="Arial"/>
+      <a:buFont typeface="Arial" panose="020B0604020202020204"/>
       <a:defRPr sz="1400" b="0" i="0" u="none" strike="noStrike" cap="none">
         <a:solidFill>
           <a:srgbClr val="000000"/>
         </a:solidFill>
-        <a:latin typeface="Arial"/>
-        <a:ea typeface="Arial"/>
-        <a:cs typeface="Arial"/>
-        <a:sym typeface="Arial"/>
+        <a:latin typeface="Arial" panose="020B0604020202020204"/>
+        <a:ea typeface="Arial" panose="020B0604020202020204"/>
+        <a:cs typeface="Arial" panose="020B0604020202020204"/>
+        <a:sym typeface="Arial" panose="020B0604020202020204"/>
       </a:defRPr>
     </a:lvl8pPr>
     <a:lvl9pPr marR="0" lvl="8" algn="l" rtl="0">
@@ -794,15 +711,15 @@
       <a:buClr>
         <a:srgbClr val="000000"/>
       </a:buClr>
-      <a:buFont typeface="Arial"/>
+      <a:buFont typeface="Arial" panose="020B0604020202020204"/>
       <a:defRPr sz="1400" b="0" i="0" u="none" strike="noStrike" cap="none">
         <a:solidFill>
           <a:srgbClr val="000000"/>
         </a:solidFill>
-        <a:latin typeface="Arial"/>
-        <a:ea typeface="Arial"/>
-        <a:cs typeface="Arial"/>
-        <a:sym typeface="Arial"/>
+        <a:latin typeface="Arial" panose="020B0604020202020204"/>
+        <a:ea typeface="Arial" panose="020B0604020202020204"/>
+        <a:cs typeface="Arial" panose="020B0604020202020204"/>
+        <a:sym typeface="Arial" panose="020B0604020202020204"/>
       </a:defRPr>
     </a:lvl9pPr>
   </p:notesStyle>
@@ -810,7 +727,7 @@
 </file>
 
 <file path=ppt/notesSlides/notesSlide1.xml><?xml version="1.0" encoding="utf-8"?>
-<p:notes xmlns:a="http://schemas.openxmlformats.org/drawingml/2006/main" xmlns:r="http://schemas.openxmlformats.org/officeDocument/2006/relationships" xmlns:p="http://schemas.openxmlformats.org/presentationml/2006/main" showMasterSp="0" showMasterPhAnim="0">
+<p:notes xmlns:a="http://schemas.openxmlformats.org/drawingml/2006/main" xmlns:r="http://schemas.openxmlformats.org/officeDocument/2006/relationships" xmlns:p="http://schemas.openxmlformats.org/presentationml/2006/main" showMasterPhAnim="0" showMasterSp="0">
   <p:cSld>
     <p:spTree>
       <p:nvGrpSpPr>
@@ -901,7 +818,6 @@
               </a:spcAft>
               <a:buNone/>
             </a:pPr>
-            <a:endParaRPr/>
           </a:p>
         </p:txBody>
       </p:sp>
@@ -914,7 +830,110 @@
 </file>
 
 <file path=ppt/notesSlides/notesSlide10.xml><?xml version="1.0" encoding="utf-8"?>
-<p:notes xmlns:a="http://schemas.openxmlformats.org/drawingml/2006/main" xmlns:r="http://schemas.openxmlformats.org/officeDocument/2006/relationships" xmlns:p="http://schemas.openxmlformats.org/presentationml/2006/main" showMasterSp="0" showMasterPhAnim="0">
+<p:notes xmlns:a="http://schemas.openxmlformats.org/drawingml/2006/main" xmlns:r="http://schemas.openxmlformats.org/officeDocument/2006/relationships" xmlns:p="http://schemas.openxmlformats.org/presentationml/2006/main" showMasterPhAnim="0" showMasterSp="0">
+  <p:cSld>
+    <p:spTree>
+      <p:nvGrpSpPr>
+        <p:cNvPr id="1" name="Shape 130"/>
+        <p:cNvGrpSpPr/>
+        <p:nvPr/>
+      </p:nvGrpSpPr>
+      <p:grpSpPr>
+        <a:xfrm>
+          <a:off x="0" y="0"/>
+          <a:ext cx="0" cy="0"/>
+          <a:chOff x="0" y="0"/>
+          <a:chExt cx="0" cy="0"/>
+        </a:xfrm>
+      </p:grpSpPr>
+      <p:sp>
+        <p:nvSpPr>
+          <p:cNvPr id="131" name="Google Shape;131;g303f8f474e3_0_178:notes"/>
+          <p:cNvSpPr>
+            <a:spLocks noGrp="1" noRot="1" noChangeAspect="1"/>
+          </p:cNvSpPr>
+          <p:nvPr>
+            <p:ph type="sldImg" idx="2"/>
+          </p:nvPr>
+        </p:nvSpPr>
+        <p:spPr>
+          <a:xfrm>
+            <a:off x="381300" y="685800"/>
+            <a:ext cx="6096000" cy="3429000"/>
+          </a:xfrm>
+          <a:custGeom>
+            <a:avLst/>
+            <a:gdLst/>
+            <a:ahLst/>
+            <a:cxnLst/>
+            <a:rect l="l" t="t" r="r" b="b"/>
+            <a:pathLst>
+              <a:path w="120000" h="120000" extrusionOk="0">
+                <a:moveTo>
+                  <a:pt x="0" y="0"/>
+                </a:moveTo>
+                <a:lnTo>
+                  <a:pt x="120000" y="0"/>
+                </a:lnTo>
+                <a:lnTo>
+                  <a:pt x="120000" y="120000"/>
+                </a:lnTo>
+                <a:lnTo>
+                  <a:pt x="0" y="120000"/>
+                </a:lnTo>
+                <a:close/>
+              </a:path>
+            </a:pathLst>
+          </a:custGeom>
+        </p:spPr>
+      </p:sp>
+      <p:sp>
+        <p:nvSpPr>
+          <p:cNvPr id="132" name="Google Shape;132;g303f8f474e3_0_178:notes"/>
+          <p:cNvSpPr txBox="1">
+            <a:spLocks noGrp="1"/>
+          </p:cNvSpPr>
+          <p:nvPr>
+            <p:ph type="body" idx="1"/>
+          </p:nvPr>
+        </p:nvSpPr>
+        <p:spPr>
+          <a:xfrm>
+            <a:off x="685800" y="4343400"/>
+            <a:ext cx="5486400" cy="4114800"/>
+          </a:xfrm>
+          <a:prstGeom prst="rect">
+            <a:avLst/>
+          </a:prstGeom>
+        </p:spPr>
+        <p:txBody>
+          <a:bodyPr spcFirstLastPara="1" wrap="square" lIns="91425" tIns="91425" rIns="91425" bIns="91425" anchor="t" anchorCtr="0">
+            <a:noAutofit/>
+          </a:bodyPr>
+          <a:lstStyle/>
+          <a:p>
+            <a:pPr marL="0" lvl="0" indent="0" algn="l" rtl="0">
+              <a:spcBef>
+                <a:spcPts val="0"/>
+              </a:spcBef>
+              <a:spcAft>
+                <a:spcPts val="0"/>
+              </a:spcAft>
+              <a:buNone/>
+            </a:pPr>
+          </a:p>
+        </p:txBody>
+      </p:sp>
+    </p:spTree>
+  </p:cSld>
+  <p:clrMapOvr>
+    <a:masterClrMapping/>
+  </p:clrMapOvr>
+</p:notes>
+</file>
+
+<file path=ppt/notesSlides/notesSlide11.xml><?xml version="1.0" encoding="utf-8"?>
+<p:notes xmlns:a="http://schemas.openxmlformats.org/drawingml/2006/main" xmlns:r="http://schemas.openxmlformats.org/officeDocument/2006/relationships" xmlns:p="http://schemas.openxmlformats.org/presentationml/2006/main" showMasterPhAnim="0" showMasterSp="0">
   <p:cSld>
     <p:spTree>
       <p:nvGrpSpPr>
@@ -1005,7 +1024,6 @@
               </a:spcAft>
               <a:buNone/>
             </a:pPr>
-            <a:endParaRPr/>
           </a:p>
         </p:txBody>
       </p:sp>
@@ -1018,7 +1036,7 @@
 </file>
 
 <file path=ppt/notesSlides/notesSlide2.xml><?xml version="1.0" encoding="utf-8"?>
-<p:notes xmlns:a="http://schemas.openxmlformats.org/drawingml/2006/main" xmlns:r="http://schemas.openxmlformats.org/officeDocument/2006/relationships" xmlns:p="http://schemas.openxmlformats.org/presentationml/2006/main" showMasterSp="0" showMasterPhAnim="0">
+<p:notes xmlns:a="http://schemas.openxmlformats.org/drawingml/2006/main" xmlns:r="http://schemas.openxmlformats.org/officeDocument/2006/relationships" xmlns:p="http://schemas.openxmlformats.org/presentationml/2006/main" showMasterPhAnim="0" showMasterSp="0">
   <p:cSld>
     <p:spTree>
       <p:nvGrpSpPr>
@@ -1109,7 +1127,6 @@
               </a:spcAft>
               <a:buNone/>
             </a:pPr>
-            <a:endParaRPr/>
           </a:p>
         </p:txBody>
       </p:sp>
@@ -1122,7 +1139,7 @@
 </file>
 
 <file path=ppt/notesSlides/notesSlide3.xml><?xml version="1.0" encoding="utf-8"?>
-<p:notes xmlns:a="http://schemas.openxmlformats.org/drawingml/2006/main" xmlns:r="http://schemas.openxmlformats.org/officeDocument/2006/relationships" xmlns:p="http://schemas.openxmlformats.org/presentationml/2006/main" showMasterSp="0" showMasterPhAnim="0">
+<p:notes xmlns:a="http://schemas.openxmlformats.org/drawingml/2006/main" xmlns:r="http://schemas.openxmlformats.org/officeDocument/2006/relationships" xmlns:p="http://schemas.openxmlformats.org/presentationml/2006/main" showMasterPhAnim="0" showMasterSp="0">
   <p:cSld>
     <p:spTree>
       <p:nvGrpSpPr>
@@ -1213,7 +1230,6 @@
               </a:spcAft>
               <a:buNone/>
             </a:pPr>
-            <a:endParaRPr/>
           </a:p>
         </p:txBody>
       </p:sp>
@@ -1226,7 +1242,7 @@
 </file>
 
 <file path=ppt/notesSlides/notesSlide4.xml><?xml version="1.0" encoding="utf-8"?>
-<p:notes xmlns:a="http://schemas.openxmlformats.org/drawingml/2006/main" xmlns:r="http://schemas.openxmlformats.org/officeDocument/2006/relationships" xmlns:p="http://schemas.openxmlformats.org/presentationml/2006/main" showMasterSp="0" showMasterPhAnim="0">
+<p:notes xmlns:a="http://schemas.openxmlformats.org/drawingml/2006/main" xmlns:r="http://schemas.openxmlformats.org/officeDocument/2006/relationships" xmlns:p="http://schemas.openxmlformats.org/presentationml/2006/main" showMasterPhAnim="0" showMasterSp="0">
   <p:cSld>
     <p:spTree>
       <p:nvGrpSpPr>
@@ -1317,7 +1333,6 @@
               </a:spcAft>
               <a:buNone/>
             </a:pPr>
-            <a:endParaRPr/>
           </a:p>
         </p:txBody>
       </p:sp>
@@ -1330,7 +1345,110 @@
 </file>
 
 <file path=ppt/notesSlides/notesSlide5.xml><?xml version="1.0" encoding="utf-8"?>
-<p:notes xmlns:a="http://schemas.openxmlformats.org/drawingml/2006/main" xmlns:r="http://schemas.openxmlformats.org/officeDocument/2006/relationships" xmlns:p="http://schemas.openxmlformats.org/presentationml/2006/main" showMasterSp="0" showMasterPhAnim="0">
+<p:notes xmlns:a="http://schemas.openxmlformats.org/drawingml/2006/main" xmlns:r="http://schemas.openxmlformats.org/officeDocument/2006/relationships" xmlns:p="http://schemas.openxmlformats.org/presentationml/2006/main" showMasterPhAnim="0" showMasterSp="0">
+  <p:cSld>
+    <p:spTree>
+      <p:nvGrpSpPr>
+        <p:cNvPr id="1" name="Shape 100"/>
+        <p:cNvGrpSpPr/>
+        <p:nvPr/>
+      </p:nvGrpSpPr>
+      <p:grpSpPr>
+        <a:xfrm>
+          <a:off x="0" y="0"/>
+          <a:ext cx="0" cy="0"/>
+          <a:chOff x="0" y="0"/>
+          <a:chExt cx="0" cy="0"/>
+        </a:xfrm>
+      </p:grpSpPr>
+      <p:sp>
+        <p:nvSpPr>
+          <p:cNvPr id="101" name="Google Shape;101;g303f8f474e3_0_138:notes"/>
+          <p:cNvSpPr>
+            <a:spLocks noGrp="1" noRot="1" noChangeAspect="1"/>
+          </p:cNvSpPr>
+          <p:nvPr>
+            <p:ph type="sldImg" idx="2"/>
+          </p:nvPr>
+        </p:nvSpPr>
+        <p:spPr>
+          <a:xfrm>
+            <a:off x="381300" y="685800"/>
+            <a:ext cx="6096000" cy="3429000"/>
+          </a:xfrm>
+          <a:custGeom>
+            <a:avLst/>
+            <a:gdLst/>
+            <a:ahLst/>
+            <a:cxnLst/>
+            <a:rect l="l" t="t" r="r" b="b"/>
+            <a:pathLst>
+              <a:path w="120000" h="120000" extrusionOk="0">
+                <a:moveTo>
+                  <a:pt x="0" y="0"/>
+                </a:moveTo>
+                <a:lnTo>
+                  <a:pt x="120000" y="0"/>
+                </a:lnTo>
+                <a:lnTo>
+                  <a:pt x="120000" y="120000"/>
+                </a:lnTo>
+                <a:lnTo>
+                  <a:pt x="0" y="120000"/>
+                </a:lnTo>
+                <a:close/>
+              </a:path>
+            </a:pathLst>
+          </a:custGeom>
+        </p:spPr>
+      </p:sp>
+      <p:sp>
+        <p:nvSpPr>
+          <p:cNvPr id="102" name="Google Shape;102;g303f8f474e3_0_138:notes"/>
+          <p:cNvSpPr txBox="1">
+            <a:spLocks noGrp="1"/>
+          </p:cNvSpPr>
+          <p:nvPr>
+            <p:ph type="body" idx="1"/>
+          </p:nvPr>
+        </p:nvSpPr>
+        <p:spPr>
+          <a:xfrm>
+            <a:off x="685800" y="4343400"/>
+            <a:ext cx="5486400" cy="4114800"/>
+          </a:xfrm>
+          <a:prstGeom prst="rect">
+            <a:avLst/>
+          </a:prstGeom>
+        </p:spPr>
+        <p:txBody>
+          <a:bodyPr spcFirstLastPara="1" wrap="square" lIns="91425" tIns="91425" rIns="91425" bIns="91425" anchor="t" anchorCtr="0">
+            <a:noAutofit/>
+          </a:bodyPr>
+          <a:lstStyle/>
+          <a:p>
+            <a:pPr marL="0" lvl="0" indent="0" algn="l" rtl="0">
+              <a:spcBef>
+                <a:spcPts val="0"/>
+              </a:spcBef>
+              <a:spcAft>
+                <a:spcPts val="0"/>
+              </a:spcAft>
+              <a:buNone/>
+            </a:pPr>
+          </a:p>
+        </p:txBody>
+      </p:sp>
+    </p:spTree>
+  </p:cSld>
+  <p:clrMapOvr>
+    <a:masterClrMapping/>
+  </p:clrMapOvr>
+</p:notes>
+</file>
+
+<file path=ppt/notesSlides/notesSlide6.xml><?xml version="1.0" encoding="utf-8"?>
+<p:notes xmlns:a="http://schemas.openxmlformats.org/drawingml/2006/main" xmlns:r="http://schemas.openxmlformats.org/officeDocument/2006/relationships" xmlns:p="http://schemas.openxmlformats.org/presentationml/2006/main" showMasterPhAnim="0" showMasterSp="0">
   <p:cSld>
     <p:spTree>
       <p:nvGrpSpPr>
@@ -1421,7 +1539,6 @@
               </a:spcAft>
               <a:buNone/>
             </a:pPr>
-            <a:endParaRPr/>
           </a:p>
         </p:txBody>
       </p:sp>
@@ -1433,8 +1550,8 @@
 </p:notes>
 </file>
 
-<file path=ppt/notesSlides/notesSlide6.xml><?xml version="1.0" encoding="utf-8"?>
-<p:notes xmlns:a="http://schemas.openxmlformats.org/drawingml/2006/main" xmlns:r="http://schemas.openxmlformats.org/officeDocument/2006/relationships" xmlns:p="http://schemas.openxmlformats.org/presentationml/2006/main" showMasterSp="0" showMasterPhAnim="0">
+<file path=ppt/notesSlides/notesSlide7.xml><?xml version="1.0" encoding="utf-8"?>
+<p:notes xmlns:a="http://schemas.openxmlformats.org/drawingml/2006/main" xmlns:r="http://schemas.openxmlformats.org/officeDocument/2006/relationships" xmlns:p="http://schemas.openxmlformats.org/presentationml/2006/main" showMasterPhAnim="0" showMasterSp="0">
   <p:cSld>
     <p:spTree>
       <p:nvGrpSpPr>
@@ -1525,7 +1642,6 @@
               </a:spcAft>
               <a:buNone/>
             </a:pPr>
-            <a:endParaRPr/>
           </a:p>
         </p:txBody>
       </p:sp>
@@ -1537,8 +1653,8 @@
 </p:notes>
 </file>
 
-<file path=ppt/notesSlides/notesSlide7.xml><?xml version="1.0" encoding="utf-8"?>
-<p:notes xmlns:a="http://schemas.openxmlformats.org/drawingml/2006/main" xmlns:r="http://schemas.openxmlformats.org/officeDocument/2006/relationships" xmlns:p="http://schemas.openxmlformats.org/presentationml/2006/main" showMasterSp="0" showMasterPhAnim="0">
+<file path=ppt/notesSlides/notesSlide8.xml><?xml version="1.0" encoding="utf-8"?>
+<p:notes xmlns:a="http://schemas.openxmlformats.org/drawingml/2006/main" xmlns:r="http://schemas.openxmlformats.org/officeDocument/2006/relationships" xmlns:p="http://schemas.openxmlformats.org/presentationml/2006/main" showMasterPhAnim="0" showMasterSp="0">
   <p:cSld>
     <p:spTree>
       <p:nvGrpSpPr>
@@ -1629,7 +1745,6 @@
               </a:spcAft>
               <a:buNone/>
             </a:pPr>
-            <a:endParaRPr/>
           </a:p>
         </p:txBody>
       </p:sp>
@@ -1641,8 +1756,8 @@
 </p:notes>
 </file>
 
-<file path=ppt/notesSlides/notesSlide8.xml><?xml version="1.0" encoding="utf-8"?>
-<p:notes xmlns:a="http://schemas.openxmlformats.org/drawingml/2006/main" xmlns:r="http://schemas.openxmlformats.org/officeDocument/2006/relationships" xmlns:p="http://schemas.openxmlformats.org/presentationml/2006/main" showMasterSp="0" showMasterPhAnim="0">
+<file path=ppt/notesSlides/notesSlide9.xml><?xml version="1.0" encoding="utf-8"?>
+<p:notes xmlns:a="http://schemas.openxmlformats.org/drawingml/2006/main" xmlns:r="http://schemas.openxmlformats.org/officeDocument/2006/relationships" xmlns:p="http://schemas.openxmlformats.org/presentationml/2006/main" showMasterPhAnim="0" showMasterSp="0">
   <p:cSld>
     <p:spTree>
       <p:nvGrpSpPr>
@@ -1733,111 +1848,6 @@
               </a:spcAft>
               <a:buNone/>
             </a:pPr>
-            <a:endParaRPr/>
-          </a:p>
-        </p:txBody>
-      </p:sp>
-    </p:spTree>
-  </p:cSld>
-  <p:clrMapOvr>
-    <a:masterClrMapping/>
-  </p:clrMapOvr>
-</p:notes>
-</file>
-
-<file path=ppt/notesSlides/notesSlide9.xml><?xml version="1.0" encoding="utf-8"?>
-<p:notes xmlns:a="http://schemas.openxmlformats.org/drawingml/2006/main" xmlns:r="http://schemas.openxmlformats.org/officeDocument/2006/relationships" xmlns:p="http://schemas.openxmlformats.org/presentationml/2006/main" showMasterSp="0" showMasterPhAnim="0">
-  <p:cSld>
-    <p:spTree>
-      <p:nvGrpSpPr>
-        <p:cNvPr id="1" name="Shape 130"/>
-        <p:cNvGrpSpPr/>
-        <p:nvPr/>
-      </p:nvGrpSpPr>
-      <p:grpSpPr>
-        <a:xfrm>
-          <a:off x="0" y="0"/>
-          <a:ext cx="0" cy="0"/>
-          <a:chOff x="0" y="0"/>
-          <a:chExt cx="0" cy="0"/>
-        </a:xfrm>
-      </p:grpSpPr>
-      <p:sp>
-        <p:nvSpPr>
-          <p:cNvPr id="131" name="Google Shape;131;g303f8f474e3_0_178:notes"/>
-          <p:cNvSpPr>
-            <a:spLocks noGrp="1" noRot="1" noChangeAspect="1"/>
-          </p:cNvSpPr>
-          <p:nvPr>
-            <p:ph type="sldImg" idx="2"/>
-          </p:nvPr>
-        </p:nvSpPr>
-        <p:spPr>
-          <a:xfrm>
-            <a:off x="381300" y="685800"/>
-            <a:ext cx="6096000" cy="3429000"/>
-          </a:xfrm>
-          <a:custGeom>
-            <a:avLst/>
-            <a:gdLst/>
-            <a:ahLst/>
-            <a:cxnLst/>
-            <a:rect l="l" t="t" r="r" b="b"/>
-            <a:pathLst>
-              <a:path w="120000" h="120000" extrusionOk="0">
-                <a:moveTo>
-                  <a:pt x="0" y="0"/>
-                </a:moveTo>
-                <a:lnTo>
-                  <a:pt x="120000" y="0"/>
-                </a:lnTo>
-                <a:lnTo>
-                  <a:pt x="120000" y="120000"/>
-                </a:lnTo>
-                <a:lnTo>
-                  <a:pt x="0" y="120000"/>
-                </a:lnTo>
-                <a:close/>
-              </a:path>
-            </a:pathLst>
-          </a:custGeom>
-        </p:spPr>
-      </p:sp>
-      <p:sp>
-        <p:nvSpPr>
-          <p:cNvPr id="132" name="Google Shape;132;g303f8f474e3_0_178:notes"/>
-          <p:cNvSpPr txBox="1">
-            <a:spLocks noGrp="1"/>
-          </p:cNvSpPr>
-          <p:nvPr>
-            <p:ph type="body" idx="1"/>
-          </p:nvPr>
-        </p:nvSpPr>
-        <p:spPr>
-          <a:xfrm>
-            <a:off x="685800" y="4343400"/>
-            <a:ext cx="5486400" cy="4114800"/>
-          </a:xfrm>
-          <a:prstGeom prst="rect">
-            <a:avLst/>
-          </a:prstGeom>
-        </p:spPr>
-        <p:txBody>
-          <a:bodyPr spcFirstLastPara="1" wrap="square" lIns="91425" tIns="91425" rIns="91425" bIns="91425" anchor="t" anchorCtr="0">
-            <a:noAutofit/>
-          </a:bodyPr>
-          <a:lstStyle/>
-          <a:p>
-            <a:pPr marL="0" lvl="0" indent="0" algn="l" rtl="0">
-              <a:spcBef>
-                <a:spcPts val="0"/>
-              </a:spcBef>
-              <a:spcAft>
-                <a:spcPts val="0"/>
-              </a:spcAft>
-              <a:buNone/>
-            </a:pPr>
-            <a:endParaRPr/>
           </a:p>
         </p:txBody>
       </p:sp>
@@ -1850,7 +1860,7 @@
 </file>
 
 <file path=ppt/slideLayouts/slideLayout1.xml><?xml version="1.0" encoding="utf-8"?>
-<p:sldLayout xmlns:a="http://schemas.openxmlformats.org/drawingml/2006/main" xmlns:r="http://schemas.openxmlformats.org/officeDocument/2006/relationships" xmlns:p="http://schemas.openxmlformats.org/presentationml/2006/main" matchingName="Title slide" type="title">
+<p:sldLayout xmlns:a="http://schemas.openxmlformats.org/drawingml/2006/main" xmlns:r="http://schemas.openxmlformats.org/officeDocument/2006/relationships" xmlns:p="http://schemas.openxmlformats.org/presentationml/2006/main" type="title" matchingName="Title slide">
   <p:cSld name="TITLE">
     <p:bg>
       <p:bgPr>
@@ -1910,7 +1920,6 @@
               </a:spcAft>
               <a:buNone/>
             </a:pPr>
-            <a:endParaRPr/>
           </a:p>
         </p:txBody>
       </p:sp>
@@ -1964,7 +1973,6 @@
                 </a:spcAft>
                 <a:buNone/>
               </a:pPr>
-              <a:endParaRPr/>
             </a:p>
           </p:txBody>
         </p:sp>
@@ -2004,7 +2012,6 @@
                 </a:spcAft>
                 <a:buNone/>
               </a:pPr>
-              <a:endParaRPr/>
             </a:p>
           </p:txBody>
         </p:sp>
@@ -2133,9 +2140,7 @@
               <a:defRPr sz="4200"/>
             </a:lvl9pPr>
           </a:lstStyle>
-          <a:p>
-            <a:endParaRPr/>
-          </a:p>
+          <a:p/>
         </p:txBody>
       </p:sp>
       <p:sp>
@@ -2289,9 +2294,7 @@
               <a:defRPr sz="1600"/>
             </a:lvl9pPr>
           </a:lstStyle>
-          <a:p>
-            <a:endParaRPr/>
-          </a:p>
+          <a:p/>
         </p:txBody>
       </p:sp>
       <p:sp>
@@ -2366,10 +2369,9 @@
               <a:buNone/>
             </a:pPr>
             <a:fld id="{00000000-1234-1234-1234-123412341234}" type="slidenum">
-              <a:rPr lang="en"/>
-              <a:t>‹#›</a:t>
+              <a:rPr lang="en-GB"/>
             </a:fld>
-            <a:endParaRPr/>
+            <a:endParaRPr lang="en-GB"/>
           </a:p>
         </p:txBody>
       </p:sp>
@@ -2456,7 +2458,6 @@
                 </a:spcAft>
                 <a:buNone/>
               </a:pPr>
-              <a:endParaRPr/>
             </a:p>
           </p:txBody>
         </p:sp>
@@ -2496,7 +2497,6 @@
                 </a:spcAft>
                 <a:buNone/>
               </a:pPr>
-              <a:endParaRPr/>
             </a:p>
           </p:txBody>
         </p:sp>
@@ -2882,9 +2882,7 @@
               </a:defRPr>
             </a:lvl9pPr>
           </a:lstStyle>
-          <a:p>
-            <a:endParaRPr/>
-          </a:p>
+          <a:p/>
         </p:txBody>
       </p:sp>
       <p:sp>
@@ -2995,10 +2993,9 @@
               <a:buNone/>
             </a:pPr>
             <a:fld id="{00000000-1234-1234-1234-123412341234}" type="slidenum">
-              <a:rPr lang="en"/>
-              <a:t>‹#›</a:t>
+              <a:rPr lang="en-GB"/>
             </a:fld>
-            <a:endParaRPr/>
+            <a:endParaRPr lang="en-GB"/>
           </a:p>
         </p:txBody>
       </p:sp>
@@ -3011,7 +3008,7 @@
 </file>
 
 <file path=ppt/slideLayouts/slideLayout11.xml><?xml version="1.0" encoding="utf-8"?>
-<p:sldLayout xmlns:a="http://schemas.openxmlformats.org/drawingml/2006/main" xmlns:r="http://schemas.openxmlformats.org/officeDocument/2006/relationships" xmlns:p="http://schemas.openxmlformats.org/presentationml/2006/main" matchingName="Blank" type="blank">
+<p:sldLayout xmlns:a="http://schemas.openxmlformats.org/drawingml/2006/main" xmlns:r="http://schemas.openxmlformats.org/officeDocument/2006/relationships" xmlns:p="http://schemas.openxmlformats.org/presentationml/2006/main" type="blank" matchingName="Blank">
   <p:cSld name="BLANK">
     <p:spTree>
       <p:nvGrpSpPr>
@@ -3099,10 +3096,9 @@
               <a:buNone/>
             </a:pPr>
             <a:fld id="{00000000-1234-1234-1234-123412341234}" type="slidenum">
-              <a:rPr lang="en"/>
-              <a:t>‹#›</a:t>
+              <a:rPr lang="en-GB"/>
             </a:fld>
-            <a:endParaRPr/>
+            <a:endParaRPr lang="en-GB"/>
           </a:p>
         </p:txBody>
       </p:sp>
@@ -3115,7 +3111,7 @@
 </file>
 
 <file path=ppt/slideLayouts/slideLayout2.xml><?xml version="1.0" encoding="utf-8"?>
-<p:sldLayout xmlns:a="http://schemas.openxmlformats.org/drawingml/2006/main" xmlns:r="http://schemas.openxmlformats.org/officeDocument/2006/relationships" xmlns:p="http://schemas.openxmlformats.org/presentationml/2006/main" matchingName="Section header" type="secHead">
+<p:sldLayout xmlns:a="http://schemas.openxmlformats.org/drawingml/2006/main" xmlns:r="http://schemas.openxmlformats.org/officeDocument/2006/relationships" xmlns:p="http://schemas.openxmlformats.org/presentationml/2006/main" type="secHead" matchingName="Section header">
   <p:cSld name="SECTION_HEADER">
     <p:bg>
       <p:bgPr>
@@ -3189,7 +3185,6 @@
                 </a:spcAft>
                 <a:buNone/>
               </a:pPr>
-              <a:endParaRPr/>
             </a:p>
           </p:txBody>
         </p:sp>
@@ -3229,7 +3224,6 @@
                 </a:spcAft>
                 <a:buNone/>
               </a:pPr>
-              <a:endParaRPr/>
             </a:p>
           </p:txBody>
         </p:sp>
@@ -3421,9 +3415,7 @@
               </a:defRPr>
             </a:lvl9pPr>
           </a:lstStyle>
-          <a:p>
-            <a:endParaRPr/>
-          </a:p>
+          <a:p/>
         </p:txBody>
       </p:sp>
       <p:sp>
@@ -3534,10 +3526,9 @@
               <a:buNone/>
             </a:pPr>
             <a:fld id="{00000000-1234-1234-1234-123412341234}" type="slidenum">
-              <a:rPr lang="en"/>
-              <a:t>‹#›</a:t>
+              <a:rPr lang="en-GB"/>
             </a:fld>
-            <a:endParaRPr/>
+            <a:endParaRPr lang="en-GB"/>
           </a:p>
         </p:txBody>
       </p:sp>
@@ -3550,7 +3541,7 @@
 </file>
 
 <file path=ppt/slideLayouts/slideLayout3.xml><?xml version="1.0" encoding="utf-8"?>
-<p:sldLayout xmlns:a="http://schemas.openxmlformats.org/drawingml/2006/main" xmlns:r="http://schemas.openxmlformats.org/officeDocument/2006/relationships" xmlns:p="http://schemas.openxmlformats.org/presentationml/2006/main" matchingName="Title and body" type="tx">
+<p:sldLayout xmlns:a="http://schemas.openxmlformats.org/drawingml/2006/main" xmlns:r="http://schemas.openxmlformats.org/officeDocument/2006/relationships" xmlns:p="http://schemas.openxmlformats.org/presentationml/2006/main" type="tx" matchingName="Title and body">
   <p:cSld name="TITLE_AND_BODY">
     <p:spTree>
       <p:nvGrpSpPr>
@@ -3602,7 +3593,6 @@
               </a:spcAft>
               <a:buNone/>
             </a:pPr>
-            <a:endParaRPr/>
           </a:p>
         </p:txBody>
       </p:sp>
@@ -3656,7 +3646,6 @@
                 </a:spcAft>
                 <a:buNone/>
               </a:pPr>
-              <a:endParaRPr/>
             </a:p>
           </p:txBody>
         </p:sp>
@@ -3696,7 +3685,6 @@
                 </a:spcAft>
                 <a:buNone/>
               </a:pPr>
-              <a:endParaRPr/>
             </a:p>
           </p:txBody>
         </p:sp>
@@ -3825,9 +3813,7 @@
               <a:defRPr sz="2600"/>
             </a:lvl9pPr>
           </a:lstStyle>
-          <a:p>
-            <a:endParaRPr/>
-          </a:p>
+          <a:p/>
         </p:txBody>
       </p:sp>
       <p:sp>
@@ -3954,9 +3940,7 @@
               <a:defRPr/>
             </a:lvl9pPr>
           </a:lstStyle>
-          <a:p>
-            <a:endParaRPr/>
-          </a:p>
+          <a:p/>
         </p:txBody>
       </p:sp>
       <p:sp>
@@ -4031,10 +4015,9 @@
               <a:buNone/>
             </a:pPr>
             <a:fld id="{00000000-1234-1234-1234-123412341234}" type="slidenum">
-              <a:rPr lang="en"/>
-              <a:t>‹#›</a:t>
+              <a:rPr lang="en-GB"/>
             </a:fld>
-            <a:endParaRPr/>
+            <a:endParaRPr lang="en-GB"/>
           </a:p>
         </p:txBody>
       </p:sp>
@@ -4047,7 +4030,7 @@
 </file>
 
 <file path=ppt/slideLayouts/slideLayout4.xml><?xml version="1.0" encoding="utf-8"?>
-<p:sldLayout xmlns:a="http://schemas.openxmlformats.org/drawingml/2006/main" xmlns:r="http://schemas.openxmlformats.org/officeDocument/2006/relationships" xmlns:p="http://schemas.openxmlformats.org/presentationml/2006/main" matchingName="Title and two columns" type="twoColTx">
+<p:sldLayout xmlns:a="http://schemas.openxmlformats.org/drawingml/2006/main" xmlns:r="http://schemas.openxmlformats.org/officeDocument/2006/relationships" xmlns:p="http://schemas.openxmlformats.org/presentationml/2006/main" type="twoColTx" matchingName="Title and two columns">
   <p:cSld name="TITLE_AND_TWO_COLUMNS">
     <p:spTree>
       <p:nvGrpSpPr>
@@ -4099,7 +4082,6 @@
               </a:spcAft>
               <a:buNone/>
             </a:pPr>
-            <a:endParaRPr/>
           </a:p>
         </p:txBody>
       </p:sp>
@@ -4153,7 +4135,6 @@
                 </a:spcAft>
                 <a:buNone/>
               </a:pPr>
-              <a:endParaRPr/>
             </a:p>
           </p:txBody>
         </p:sp>
@@ -4193,7 +4174,6 @@
                 </a:spcAft>
                 <a:buNone/>
               </a:pPr>
-              <a:endParaRPr/>
             </a:p>
           </p:txBody>
         </p:sp>
@@ -4322,9 +4302,7 @@
               <a:defRPr sz="2600"/>
             </a:lvl9pPr>
           </a:lstStyle>
-          <a:p>
-            <a:endParaRPr/>
-          </a:p>
+          <a:p/>
         </p:txBody>
       </p:sp>
       <p:sp>
@@ -4451,9 +4429,7 @@
               <a:defRPr/>
             </a:lvl9pPr>
           </a:lstStyle>
-          <a:p>
-            <a:endParaRPr/>
-          </a:p>
+          <a:p/>
         </p:txBody>
       </p:sp>
       <p:sp>
@@ -4580,9 +4556,7 @@
               <a:defRPr/>
             </a:lvl9pPr>
           </a:lstStyle>
-          <a:p>
-            <a:endParaRPr/>
-          </a:p>
+          <a:p/>
         </p:txBody>
       </p:sp>
       <p:sp>
@@ -4657,10 +4631,9 @@
               <a:buNone/>
             </a:pPr>
             <a:fld id="{00000000-1234-1234-1234-123412341234}" type="slidenum">
-              <a:rPr lang="en"/>
-              <a:t>‹#›</a:t>
+              <a:rPr lang="en-GB"/>
             </a:fld>
-            <a:endParaRPr/>
+            <a:endParaRPr lang="en-GB"/>
           </a:p>
         </p:txBody>
       </p:sp>
@@ -4673,7 +4646,7 @@
 </file>
 
 <file path=ppt/slideLayouts/slideLayout5.xml><?xml version="1.0" encoding="utf-8"?>
-<p:sldLayout xmlns:a="http://schemas.openxmlformats.org/drawingml/2006/main" xmlns:r="http://schemas.openxmlformats.org/officeDocument/2006/relationships" xmlns:p="http://schemas.openxmlformats.org/presentationml/2006/main" matchingName="Title only" type="titleOnly">
+<p:sldLayout xmlns:a="http://schemas.openxmlformats.org/drawingml/2006/main" xmlns:r="http://schemas.openxmlformats.org/officeDocument/2006/relationships" xmlns:p="http://schemas.openxmlformats.org/presentationml/2006/main" type="titleOnly" matchingName="Title only">
   <p:cSld name="TITLE_ONLY">
     <p:spTree>
       <p:nvGrpSpPr>
@@ -4725,7 +4698,6 @@
               </a:spcAft>
               <a:buNone/>
             </a:pPr>
-            <a:endParaRPr/>
           </a:p>
         </p:txBody>
       </p:sp>
@@ -4779,7 +4751,6 @@
                 </a:spcAft>
                 <a:buNone/>
               </a:pPr>
-              <a:endParaRPr/>
             </a:p>
           </p:txBody>
         </p:sp>
@@ -4819,7 +4790,6 @@
                 </a:spcAft>
                 <a:buNone/>
               </a:pPr>
-              <a:endParaRPr/>
             </a:p>
           </p:txBody>
         </p:sp>
@@ -4948,9 +4918,7 @@
               <a:defRPr sz="2600"/>
             </a:lvl9pPr>
           </a:lstStyle>
-          <a:p>
-            <a:endParaRPr/>
-          </a:p>
+          <a:p/>
         </p:txBody>
       </p:sp>
       <p:sp>
@@ -5025,10 +4993,9 @@
               <a:buNone/>
             </a:pPr>
             <a:fld id="{00000000-1234-1234-1234-123412341234}" type="slidenum">
-              <a:rPr lang="en"/>
-              <a:t>‹#›</a:t>
+              <a:rPr lang="en-GB"/>
             </a:fld>
-            <a:endParaRPr/>
+            <a:endParaRPr lang="en-GB"/>
           </a:p>
         </p:txBody>
       </p:sp>
@@ -5093,7 +5060,6 @@
               </a:spcAft>
               <a:buNone/>
             </a:pPr>
-            <a:endParaRPr/>
           </a:p>
         </p:txBody>
       </p:sp>
@@ -5147,7 +5113,6 @@
                 </a:spcAft>
                 <a:buNone/>
               </a:pPr>
-              <a:endParaRPr/>
             </a:p>
           </p:txBody>
         </p:sp>
@@ -5187,7 +5152,6 @@
                 </a:spcAft>
                 <a:buNone/>
               </a:pPr>
-              <a:endParaRPr/>
             </a:p>
           </p:txBody>
         </p:sp>
@@ -5316,9 +5280,7 @@
               <a:defRPr sz="2600"/>
             </a:lvl9pPr>
           </a:lstStyle>
-          <a:p>
-            <a:endParaRPr/>
-          </a:p>
+          <a:p/>
         </p:txBody>
       </p:sp>
       <p:sp>
@@ -5445,9 +5407,7 @@
               <a:defRPr/>
             </a:lvl9pPr>
           </a:lstStyle>
-          <a:p>
-            <a:endParaRPr/>
-          </a:p>
+          <a:p/>
         </p:txBody>
       </p:sp>
       <p:sp>
@@ -5522,10 +5482,9 @@
               <a:buNone/>
             </a:pPr>
             <a:fld id="{00000000-1234-1234-1234-123412341234}" type="slidenum">
-              <a:rPr lang="en"/>
-              <a:t>‹#›</a:t>
+              <a:rPr lang="en-GB"/>
             </a:fld>
-            <a:endParaRPr/>
+            <a:endParaRPr lang="en-GB"/>
           </a:p>
         </p:txBody>
       </p:sp>
@@ -5612,7 +5571,6 @@
                 </a:spcAft>
                 <a:buNone/>
               </a:pPr>
-              <a:endParaRPr/>
             </a:p>
           </p:txBody>
         </p:sp>
@@ -5652,7 +5610,6 @@
                 </a:spcAft>
                 <a:buNone/>
               </a:pPr>
-              <a:endParaRPr/>
             </a:p>
           </p:txBody>
         </p:sp>
@@ -5844,9 +5801,7 @@
               </a:defRPr>
             </a:lvl9pPr>
           </a:lstStyle>
-          <a:p>
-            <a:endParaRPr/>
-          </a:p>
+          <a:p/>
         </p:txBody>
       </p:sp>
       <p:sp>
@@ -5957,10 +5912,9 @@
               <a:buNone/>
             </a:pPr>
             <a:fld id="{00000000-1234-1234-1234-123412341234}" type="slidenum">
-              <a:rPr lang="en"/>
-              <a:t>‹#›</a:t>
+              <a:rPr lang="en-GB"/>
             </a:fld>
-            <a:endParaRPr/>
+            <a:endParaRPr lang="en-GB"/>
           </a:p>
         </p:txBody>
       </p:sp>
@@ -6025,7 +5979,6 @@
               </a:spcAft>
               <a:buNone/>
             </a:pPr>
-            <a:endParaRPr/>
           </a:p>
         </p:txBody>
       </p:sp>
@@ -6079,7 +6032,6 @@
                 </a:spcAft>
                 <a:buNone/>
               </a:pPr>
-              <a:endParaRPr/>
             </a:p>
           </p:txBody>
         </p:sp>
@@ -6119,7 +6071,6 @@
                 </a:spcAft>
                 <a:buNone/>
               </a:pPr>
-              <a:endParaRPr/>
             </a:p>
           </p:txBody>
         </p:sp>
@@ -6248,9 +6199,7 @@
               <a:defRPr sz="2600"/>
             </a:lvl9pPr>
           </a:lstStyle>
-          <a:p>
-            <a:endParaRPr/>
-          </a:p>
+          <a:p/>
         </p:txBody>
       </p:sp>
       <p:sp>
@@ -6404,9 +6353,7 @@
               <a:defRPr sz="1600"/>
             </a:lvl9pPr>
           </a:lstStyle>
-          <a:p>
-            <a:endParaRPr/>
-          </a:p>
+          <a:p/>
         </p:txBody>
       </p:sp>
       <p:sp>
@@ -6533,9 +6480,7 @@
               <a:defRPr/>
             </a:lvl9pPr>
           </a:lstStyle>
-          <a:p>
-            <a:endParaRPr/>
-          </a:p>
+          <a:p/>
         </p:txBody>
       </p:sp>
       <p:sp>
@@ -6610,10 +6555,9 @@
               <a:buNone/>
             </a:pPr>
             <a:fld id="{00000000-1234-1234-1234-123412341234}" type="slidenum">
-              <a:rPr lang="en"/>
-              <a:t>‹#›</a:t>
+              <a:rPr lang="en-GB"/>
             </a:fld>
-            <a:endParaRPr/>
+            <a:endParaRPr lang="en-GB"/>
           </a:p>
         </p:txBody>
       </p:sp>
@@ -6681,9 +6625,7 @@
               <a:defRPr/>
             </a:lvl1pPr>
           </a:lstStyle>
-          <a:p>
-            <a:endParaRPr/>
-          </a:p>
+          <a:p/>
         </p:txBody>
       </p:sp>
       <p:sp>
@@ -6758,10 +6700,9 @@
               <a:buNone/>
             </a:pPr>
             <a:fld id="{00000000-1234-1234-1234-123412341234}" type="slidenum">
-              <a:rPr lang="en"/>
-              <a:t>‹#›</a:t>
+              <a:rPr lang="en-GB"/>
             </a:fld>
-            <a:endParaRPr/>
+            <a:endParaRPr lang="en-GB"/>
           </a:p>
         </p:txBody>
       </p:sp>
@@ -6775,7 +6716,7 @@
 
 <file path=ppt/slideMasters/slideMaster1.xml><?xml version="1.0" encoding="utf-8"?>
 <p:sldMaster xmlns:a="http://schemas.openxmlformats.org/drawingml/2006/main" xmlns:r="http://schemas.openxmlformats.org/officeDocument/2006/relationships" xmlns:p="http://schemas.openxmlformats.org/presentationml/2006/main">
-  <p:cSld name="streamline">
+  <p:cSld>
     <p:bg>
       <p:bgPr>
         <a:solidFill>
@@ -7034,9 +6975,7 @@
               </a:defRPr>
             </a:lvl9pPr>
           </a:lstStyle>
-          <a:p>
-            <a:endParaRPr/>
-          </a:p>
+          <a:p/>
         </p:txBody>
       </p:sp>
       <p:sp>
@@ -7081,16 +7020,16 @@
                 <a:schemeClr val="accent1"/>
               </a:buClr>
               <a:buSzPts val="1300"/>
-              <a:buFont typeface="Lato"/>
+              <a:buFont typeface="Lato" panose="020F0502020204030203"/>
               <a:buChar char="●"/>
               <a:defRPr sz="1300">
                 <a:solidFill>
                   <a:schemeClr val="accent1"/>
                 </a:solidFill>
-                <a:latin typeface="Lato"/>
-                <a:ea typeface="Lato"/>
-                <a:cs typeface="Lato"/>
-                <a:sym typeface="Lato"/>
+                <a:latin typeface="Lato" panose="020F0502020204030203"/>
+                <a:ea typeface="Lato" panose="020F0502020204030203"/>
+                <a:cs typeface="Lato" panose="020F0502020204030203"/>
+                <a:sym typeface="Lato" panose="020F0502020204030203"/>
               </a:defRPr>
             </a:lvl1pPr>
             <a:lvl2pPr marL="914400" lvl="1" indent="-298450">
@@ -7107,16 +7046,16 @@
                 <a:schemeClr val="accent1"/>
               </a:buClr>
               <a:buSzPts val="1100"/>
-              <a:buFont typeface="Lato"/>
+              <a:buFont typeface="Lato" panose="020F0502020204030203"/>
               <a:buChar char="○"/>
               <a:defRPr sz="1100">
                 <a:solidFill>
                   <a:schemeClr val="accent1"/>
                 </a:solidFill>
-                <a:latin typeface="Lato"/>
-                <a:ea typeface="Lato"/>
-                <a:cs typeface="Lato"/>
-                <a:sym typeface="Lato"/>
+                <a:latin typeface="Lato" panose="020F0502020204030203"/>
+                <a:ea typeface="Lato" panose="020F0502020204030203"/>
+                <a:cs typeface="Lato" panose="020F0502020204030203"/>
+                <a:sym typeface="Lato" panose="020F0502020204030203"/>
               </a:defRPr>
             </a:lvl2pPr>
             <a:lvl3pPr marL="1371600" lvl="2" indent="-298450">
@@ -7133,16 +7072,16 @@
                 <a:schemeClr val="accent1"/>
               </a:buClr>
               <a:buSzPts val="1100"/>
-              <a:buFont typeface="Lato"/>
+              <a:buFont typeface="Lato" panose="020F0502020204030203"/>
               <a:buChar char="■"/>
               <a:defRPr sz="1100">
                 <a:solidFill>
                   <a:schemeClr val="accent1"/>
                 </a:solidFill>
-                <a:latin typeface="Lato"/>
-                <a:ea typeface="Lato"/>
-                <a:cs typeface="Lato"/>
-                <a:sym typeface="Lato"/>
+                <a:latin typeface="Lato" panose="020F0502020204030203"/>
+                <a:ea typeface="Lato" panose="020F0502020204030203"/>
+                <a:cs typeface="Lato" panose="020F0502020204030203"/>
+                <a:sym typeface="Lato" panose="020F0502020204030203"/>
               </a:defRPr>
             </a:lvl3pPr>
             <a:lvl4pPr marL="1828800" lvl="3" indent="-298450">
@@ -7159,16 +7098,16 @@
                 <a:schemeClr val="accent1"/>
               </a:buClr>
               <a:buSzPts val="1100"/>
-              <a:buFont typeface="Lato"/>
+              <a:buFont typeface="Lato" panose="020F0502020204030203"/>
               <a:buChar char="●"/>
               <a:defRPr sz="1100">
                 <a:solidFill>
                   <a:schemeClr val="accent1"/>
                 </a:solidFill>
-                <a:latin typeface="Lato"/>
-                <a:ea typeface="Lato"/>
-                <a:cs typeface="Lato"/>
-                <a:sym typeface="Lato"/>
+                <a:latin typeface="Lato" panose="020F0502020204030203"/>
+                <a:ea typeface="Lato" panose="020F0502020204030203"/>
+                <a:cs typeface="Lato" panose="020F0502020204030203"/>
+                <a:sym typeface="Lato" panose="020F0502020204030203"/>
               </a:defRPr>
             </a:lvl4pPr>
             <a:lvl5pPr marL="2286000" lvl="4" indent="-298450">
@@ -7185,16 +7124,16 @@
                 <a:schemeClr val="accent1"/>
               </a:buClr>
               <a:buSzPts val="1100"/>
-              <a:buFont typeface="Lato"/>
+              <a:buFont typeface="Lato" panose="020F0502020204030203"/>
               <a:buChar char="○"/>
               <a:defRPr sz="1100">
                 <a:solidFill>
                   <a:schemeClr val="accent1"/>
                 </a:solidFill>
-                <a:latin typeface="Lato"/>
-                <a:ea typeface="Lato"/>
-                <a:cs typeface="Lato"/>
-                <a:sym typeface="Lato"/>
+                <a:latin typeface="Lato" panose="020F0502020204030203"/>
+                <a:ea typeface="Lato" panose="020F0502020204030203"/>
+                <a:cs typeface="Lato" panose="020F0502020204030203"/>
+                <a:sym typeface="Lato" panose="020F0502020204030203"/>
               </a:defRPr>
             </a:lvl5pPr>
             <a:lvl6pPr marL="2743200" lvl="5" indent="-298450">
@@ -7211,16 +7150,16 @@
                 <a:schemeClr val="accent1"/>
               </a:buClr>
               <a:buSzPts val="1100"/>
-              <a:buFont typeface="Lato"/>
+              <a:buFont typeface="Lato" panose="020F0502020204030203"/>
               <a:buChar char="■"/>
               <a:defRPr sz="1100">
                 <a:solidFill>
                   <a:schemeClr val="accent1"/>
                 </a:solidFill>
-                <a:latin typeface="Lato"/>
-                <a:ea typeface="Lato"/>
-                <a:cs typeface="Lato"/>
-                <a:sym typeface="Lato"/>
+                <a:latin typeface="Lato" panose="020F0502020204030203"/>
+                <a:ea typeface="Lato" panose="020F0502020204030203"/>
+                <a:cs typeface="Lato" panose="020F0502020204030203"/>
+                <a:sym typeface="Lato" panose="020F0502020204030203"/>
               </a:defRPr>
             </a:lvl6pPr>
             <a:lvl7pPr marL="3200400" lvl="6" indent="-298450">
@@ -7237,16 +7176,16 @@
                 <a:schemeClr val="accent1"/>
               </a:buClr>
               <a:buSzPts val="1100"/>
-              <a:buFont typeface="Lato"/>
+              <a:buFont typeface="Lato" panose="020F0502020204030203"/>
               <a:buChar char="●"/>
               <a:defRPr sz="1100">
                 <a:solidFill>
                   <a:schemeClr val="accent1"/>
                 </a:solidFill>
-                <a:latin typeface="Lato"/>
-                <a:ea typeface="Lato"/>
-                <a:cs typeface="Lato"/>
-                <a:sym typeface="Lato"/>
+                <a:latin typeface="Lato" panose="020F0502020204030203"/>
+                <a:ea typeface="Lato" panose="020F0502020204030203"/>
+                <a:cs typeface="Lato" panose="020F0502020204030203"/>
+                <a:sym typeface="Lato" panose="020F0502020204030203"/>
               </a:defRPr>
             </a:lvl7pPr>
             <a:lvl8pPr marL="3657600" lvl="7" indent="-298450">
@@ -7263,16 +7202,16 @@
                 <a:schemeClr val="accent1"/>
               </a:buClr>
               <a:buSzPts val="1100"/>
-              <a:buFont typeface="Lato"/>
+              <a:buFont typeface="Lato" panose="020F0502020204030203"/>
               <a:buChar char="○"/>
               <a:defRPr sz="1100">
                 <a:solidFill>
                   <a:schemeClr val="accent1"/>
                 </a:solidFill>
-                <a:latin typeface="Lato"/>
-                <a:ea typeface="Lato"/>
-                <a:cs typeface="Lato"/>
-                <a:sym typeface="Lato"/>
+                <a:latin typeface="Lato" panose="020F0502020204030203"/>
+                <a:ea typeface="Lato" panose="020F0502020204030203"/>
+                <a:cs typeface="Lato" panose="020F0502020204030203"/>
+                <a:sym typeface="Lato" panose="020F0502020204030203"/>
               </a:defRPr>
             </a:lvl8pPr>
             <a:lvl9pPr marL="4114800" lvl="8" indent="-298450">
@@ -7289,22 +7228,20 @@
                 <a:schemeClr val="accent1"/>
               </a:buClr>
               <a:buSzPts val="1100"/>
-              <a:buFont typeface="Lato"/>
+              <a:buFont typeface="Lato" panose="020F0502020204030203"/>
               <a:buChar char="■"/>
               <a:defRPr sz="1100">
                 <a:solidFill>
                   <a:schemeClr val="accent1"/>
                 </a:solidFill>
-                <a:latin typeface="Lato"/>
-                <a:ea typeface="Lato"/>
-                <a:cs typeface="Lato"/>
-                <a:sym typeface="Lato"/>
+                <a:latin typeface="Lato" panose="020F0502020204030203"/>
+                <a:ea typeface="Lato" panose="020F0502020204030203"/>
+                <a:cs typeface="Lato" panose="020F0502020204030203"/>
+                <a:sym typeface="Lato" panose="020F0502020204030203"/>
               </a:defRPr>
             </a:lvl9pPr>
           </a:lstStyle>
-          <a:p>
-            <a:endParaRPr/>
-          </a:p>
+          <a:p/>
         </p:txBody>
       </p:sp>
       <p:sp>
@@ -7341,10 +7278,10 @@
                 <a:solidFill>
                   <a:schemeClr val="accent1"/>
                 </a:solidFill>
-                <a:latin typeface="Lato"/>
-                <a:ea typeface="Lato"/>
-                <a:cs typeface="Lato"/>
-                <a:sym typeface="Lato"/>
+                <a:latin typeface="Lato" panose="020F0502020204030203"/>
+                <a:ea typeface="Lato" panose="020F0502020204030203"/>
+                <a:cs typeface="Lato" panose="020F0502020204030203"/>
+                <a:sym typeface="Lato" panose="020F0502020204030203"/>
               </a:defRPr>
             </a:lvl1pPr>
             <a:lvl2pPr lvl="1" algn="r">
@@ -7353,10 +7290,10 @@
                 <a:solidFill>
                   <a:schemeClr val="accent1"/>
                 </a:solidFill>
-                <a:latin typeface="Lato"/>
-                <a:ea typeface="Lato"/>
-                <a:cs typeface="Lato"/>
-                <a:sym typeface="Lato"/>
+                <a:latin typeface="Lato" panose="020F0502020204030203"/>
+                <a:ea typeface="Lato" panose="020F0502020204030203"/>
+                <a:cs typeface="Lato" panose="020F0502020204030203"/>
+                <a:sym typeface="Lato" panose="020F0502020204030203"/>
               </a:defRPr>
             </a:lvl2pPr>
             <a:lvl3pPr lvl="2" algn="r">
@@ -7365,10 +7302,10 @@
                 <a:solidFill>
                   <a:schemeClr val="accent1"/>
                 </a:solidFill>
-                <a:latin typeface="Lato"/>
-                <a:ea typeface="Lato"/>
-                <a:cs typeface="Lato"/>
-                <a:sym typeface="Lato"/>
+                <a:latin typeface="Lato" panose="020F0502020204030203"/>
+                <a:ea typeface="Lato" panose="020F0502020204030203"/>
+                <a:cs typeface="Lato" panose="020F0502020204030203"/>
+                <a:sym typeface="Lato" panose="020F0502020204030203"/>
               </a:defRPr>
             </a:lvl3pPr>
             <a:lvl4pPr lvl="3" algn="r">
@@ -7377,10 +7314,10 @@
                 <a:solidFill>
                   <a:schemeClr val="accent1"/>
                 </a:solidFill>
-                <a:latin typeface="Lato"/>
-                <a:ea typeface="Lato"/>
-                <a:cs typeface="Lato"/>
-                <a:sym typeface="Lato"/>
+                <a:latin typeface="Lato" panose="020F0502020204030203"/>
+                <a:ea typeface="Lato" panose="020F0502020204030203"/>
+                <a:cs typeface="Lato" panose="020F0502020204030203"/>
+                <a:sym typeface="Lato" panose="020F0502020204030203"/>
               </a:defRPr>
             </a:lvl4pPr>
             <a:lvl5pPr lvl="4" algn="r">
@@ -7389,10 +7326,10 @@
                 <a:solidFill>
                   <a:schemeClr val="accent1"/>
                 </a:solidFill>
-                <a:latin typeface="Lato"/>
-                <a:ea typeface="Lato"/>
-                <a:cs typeface="Lato"/>
-                <a:sym typeface="Lato"/>
+                <a:latin typeface="Lato" panose="020F0502020204030203"/>
+                <a:ea typeface="Lato" panose="020F0502020204030203"/>
+                <a:cs typeface="Lato" panose="020F0502020204030203"/>
+                <a:sym typeface="Lato" panose="020F0502020204030203"/>
               </a:defRPr>
             </a:lvl5pPr>
             <a:lvl6pPr lvl="5" algn="r">
@@ -7401,10 +7338,10 @@
                 <a:solidFill>
                   <a:schemeClr val="accent1"/>
                 </a:solidFill>
-                <a:latin typeface="Lato"/>
-                <a:ea typeface="Lato"/>
-                <a:cs typeface="Lato"/>
-                <a:sym typeface="Lato"/>
+                <a:latin typeface="Lato" panose="020F0502020204030203"/>
+                <a:ea typeface="Lato" panose="020F0502020204030203"/>
+                <a:cs typeface="Lato" panose="020F0502020204030203"/>
+                <a:sym typeface="Lato" panose="020F0502020204030203"/>
               </a:defRPr>
             </a:lvl6pPr>
             <a:lvl7pPr lvl="6" algn="r">
@@ -7413,10 +7350,10 @@
                 <a:solidFill>
                   <a:schemeClr val="accent1"/>
                 </a:solidFill>
-                <a:latin typeface="Lato"/>
-                <a:ea typeface="Lato"/>
-                <a:cs typeface="Lato"/>
-                <a:sym typeface="Lato"/>
+                <a:latin typeface="Lato" panose="020F0502020204030203"/>
+                <a:ea typeface="Lato" panose="020F0502020204030203"/>
+                <a:cs typeface="Lato" panose="020F0502020204030203"/>
+                <a:sym typeface="Lato" panose="020F0502020204030203"/>
               </a:defRPr>
             </a:lvl7pPr>
             <a:lvl8pPr lvl="7" algn="r">
@@ -7425,10 +7362,10 @@
                 <a:solidFill>
                   <a:schemeClr val="accent1"/>
                 </a:solidFill>
-                <a:latin typeface="Lato"/>
-                <a:ea typeface="Lato"/>
-                <a:cs typeface="Lato"/>
-                <a:sym typeface="Lato"/>
+                <a:latin typeface="Lato" panose="020F0502020204030203"/>
+                <a:ea typeface="Lato" panose="020F0502020204030203"/>
+                <a:cs typeface="Lato" panose="020F0502020204030203"/>
+                <a:sym typeface="Lato" panose="020F0502020204030203"/>
               </a:defRPr>
             </a:lvl8pPr>
             <a:lvl9pPr lvl="8" algn="r">
@@ -7437,10 +7374,10 @@
                 <a:solidFill>
                   <a:schemeClr val="accent1"/>
                 </a:solidFill>
-                <a:latin typeface="Lato"/>
-                <a:ea typeface="Lato"/>
-                <a:cs typeface="Lato"/>
-                <a:sym typeface="Lato"/>
+                <a:latin typeface="Lato" panose="020F0502020204030203"/>
+                <a:ea typeface="Lato" panose="020F0502020204030203"/>
+                <a:cs typeface="Lato" panose="020F0502020204030203"/>
+                <a:sym typeface="Lato" panose="020F0502020204030203"/>
               </a:defRPr>
             </a:lvl9pPr>
           </a:lstStyle>
@@ -7455,10 +7392,9 @@
               <a:buNone/>
             </a:pPr>
             <a:fld id="{00000000-1234-1234-1234-123412341234}" type="slidenum">
-              <a:rPr lang="en"/>
-              <a:t>‹#›</a:t>
+              <a:rPr lang="en-GB"/>
             </a:fld>
-            <a:endParaRPr/>
+            <a:endParaRPr lang="en-GB"/>
           </a:p>
         </p:txBody>
       </p:sp>
@@ -7466,17 +7402,17 @@
   </p:cSld>
   <p:clrMap bg1="lt1" tx1="dk1" bg2="dk2" tx2="lt2" accent1="accent1" accent2="accent2" accent3="accent3" accent4="accent4" accent5="accent5" accent6="accent6" hlink="hlink" folHlink="folHlink"/>
   <p:sldLayoutIdLst>
-    <p:sldLayoutId id="2147483648" r:id="rId1"/>
-    <p:sldLayoutId id="2147483649" r:id="rId2"/>
-    <p:sldLayoutId id="2147483650" r:id="rId3"/>
-    <p:sldLayoutId id="2147483651" r:id="rId4"/>
-    <p:sldLayoutId id="2147483652" r:id="rId5"/>
-    <p:sldLayoutId id="2147483653" r:id="rId6"/>
-    <p:sldLayoutId id="2147483654" r:id="rId7"/>
-    <p:sldLayoutId id="2147483655" r:id="rId8"/>
-    <p:sldLayoutId id="2147483656" r:id="rId9"/>
-    <p:sldLayoutId id="2147483657" r:id="rId10"/>
-    <p:sldLayoutId id="2147483658" r:id="rId11"/>
+    <p:sldLayoutId id="2147483649" r:id="rId1"/>
+    <p:sldLayoutId id="2147483650" r:id="rId2"/>
+    <p:sldLayoutId id="2147483651" r:id="rId3"/>
+    <p:sldLayoutId id="2147483652" r:id="rId4"/>
+    <p:sldLayoutId id="2147483653" r:id="rId5"/>
+    <p:sldLayoutId id="2147483654" r:id="rId6"/>
+    <p:sldLayoutId id="2147483655" r:id="rId7"/>
+    <p:sldLayoutId id="2147483656" r:id="rId8"/>
+    <p:sldLayoutId id="2147483657" r:id="rId9"/>
+    <p:sldLayoutId id="2147483658" r:id="rId10"/>
+    <p:sldLayoutId id="2147483659" r:id="rId11"/>
   </p:sldLayoutIdLst>
   <p:hf sldNum="0" hdr="0" ftr="0" dt="0"/>
   <p:txStyles>
@@ -7505,15 +7441,15 @@
         <a:buClr>
           <a:srgbClr val="000000"/>
         </a:buClr>
-        <a:buFont typeface="Arial"/>
+        <a:buFont typeface="Arial" panose="020B0604020202020204"/>
         <a:defRPr sz="1400" b="0" i="0" u="none" strike="noStrike" cap="none">
           <a:solidFill>
             <a:srgbClr val="000000"/>
           </a:solidFill>
-          <a:latin typeface="Arial"/>
-          <a:ea typeface="Arial"/>
-          <a:cs typeface="Arial"/>
-          <a:sym typeface="Arial"/>
+          <a:latin typeface="Arial" panose="020B0604020202020204"/>
+          <a:ea typeface="Arial" panose="020B0604020202020204"/>
+          <a:cs typeface="Arial" panose="020B0604020202020204"/>
+          <a:sym typeface="Arial" panose="020B0604020202020204"/>
         </a:defRPr>
       </a:lvl1pPr>
       <a:lvl2pPr marR="0" lvl="1" algn="l" rtl="0">
@@ -7529,15 +7465,15 @@
         <a:buClr>
           <a:srgbClr val="000000"/>
         </a:buClr>
-        <a:buFont typeface="Arial"/>
+        <a:buFont typeface="Arial" panose="020B0604020202020204"/>
         <a:defRPr sz="1400" b="0" i="0" u="none" strike="noStrike" cap="none">
           <a:solidFill>
             <a:srgbClr val="000000"/>
           </a:solidFill>
-          <a:latin typeface="Arial"/>
-          <a:ea typeface="Arial"/>
-          <a:cs typeface="Arial"/>
-          <a:sym typeface="Arial"/>
+          <a:latin typeface="Arial" panose="020B0604020202020204"/>
+          <a:ea typeface="Arial" panose="020B0604020202020204"/>
+          <a:cs typeface="Arial" panose="020B0604020202020204"/>
+          <a:sym typeface="Arial" panose="020B0604020202020204"/>
         </a:defRPr>
       </a:lvl2pPr>
       <a:lvl3pPr marR="0" lvl="2" algn="l" rtl="0">
@@ -7553,15 +7489,15 @@
         <a:buClr>
           <a:srgbClr val="000000"/>
         </a:buClr>
-        <a:buFont typeface="Arial"/>
+        <a:buFont typeface="Arial" panose="020B0604020202020204"/>
         <a:defRPr sz="1400" b="0" i="0" u="none" strike="noStrike" cap="none">
           <a:solidFill>
             <a:srgbClr val="000000"/>
           </a:solidFill>
-          <a:latin typeface="Arial"/>
-          <a:ea typeface="Arial"/>
-          <a:cs typeface="Arial"/>
-          <a:sym typeface="Arial"/>
+          <a:latin typeface="Arial" panose="020B0604020202020204"/>
+          <a:ea typeface="Arial" panose="020B0604020202020204"/>
+          <a:cs typeface="Arial" panose="020B0604020202020204"/>
+          <a:sym typeface="Arial" panose="020B0604020202020204"/>
         </a:defRPr>
       </a:lvl3pPr>
       <a:lvl4pPr marR="0" lvl="3" algn="l" rtl="0">
@@ -7577,15 +7513,15 @@
         <a:buClr>
           <a:srgbClr val="000000"/>
         </a:buClr>
-        <a:buFont typeface="Arial"/>
+        <a:buFont typeface="Arial" panose="020B0604020202020204"/>
         <a:defRPr sz="1400" b="0" i="0" u="none" strike="noStrike" cap="none">
           <a:solidFill>
             <a:srgbClr val="000000"/>
           </a:solidFill>
-          <a:latin typeface="Arial"/>
-          <a:ea typeface="Arial"/>
-          <a:cs typeface="Arial"/>
-          <a:sym typeface="Arial"/>
+          <a:latin typeface="Arial" panose="020B0604020202020204"/>
+          <a:ea typeface="Arial" panose="020B0604020202020204"/>
+          <a:cs typeface="Arial" panose="020B0604020202020204"/>
+          <a:sym typeface="Arial" panose="020B0604020202020204"/>
         </a:defRPr>
       </a:lvl4pPr>
       <a:lvl5pPr marR="0" lvl="4" algn="l" rtl="0">
@@ -7601,15 +7537,15 @@
         <a:buClr>
           <a:srgbClr val="000000"/>
         </a:buClr>
-        <a:buFont typeface="Arial"/>
+        <a:buFont typeface="Arial" panose="020B0604020202020204"/>
         <a:defRPr sz="1400" b="0" i="0" u="none" strike="noStrike" cap="none">
           <a:solidFill>
             <a:srgbClr val="000000"/>
           </a:solidFill>
-          <a:latin typeface="Arial"/>
-          <a:ea typeface="Arial"/>
-          <a:cs typeface="Arial"/>
-          <a:sym typeface="Arial"/>
+          <a:latin typeface="Arial" panose="020B0604020202020204"/>
+          <a:ea typeface="Arial" panose="020B0604020202020204"/>
+          <a:cs typeface="Arial" panose="020B0604020202020204"/>
+          <a:sym typeface="Arial" panose="020B0604020202020204"/>
         </a:defRPr>
       </a:lvl5pPr>
       <a:lvl6pPr marR="0" lvl="5" algn="l" rtl="0">
@@ -7625,15 +7561,15 @@
         <a:buClr>
           <a:srgbClr val="000000"/>
         </a:buClr>
-        <a:buFont typeface="Arial"/>
+        <a:buFont typeface="Arial" panose="020B0604020202020204"/>
         <a:defRPr sz="1400" b="0" i="0" u="none" strike="noStrike" cap="none">
           <a:solidFill>
             <a:srgbClr val="000000"/>
           </a:solidFill>
-          <a:latin typeface="Arial"/>
-          <a:ea typeface="Arial"/>
-          <a:cs typeface="Arial"/>
-          <a:sym typeface="Arial"/>
+          <a:latin typeface="Arial" panose="020B0604020202020204"/>
+          <a:ea typeface="Arial" panose="020B0604020202020204"/>
+          <a:cs typeface="Arial" panose="020B0604020202020204"/>
+          <a:sym typeface="Arial" panose="020B0604020202020204"/>
         </a:defRPr>
       </a:lvl6pPr>
       <a:lvl7pPr marR="0" lvl="6" algn="l" rtl="0">
@@ -7649,15 +7585,15 @@
         <a:buClr>
           <a:srgbClr val="000000"/>
         </a:buClr>
-        <a:buFont typeface="Arial"/>
+        <a:buFont typeface="Arial" panose="020B0604020202020204"/>
         <a:defRPr sz="1400" b="0" i="0" u="none" strike="noStrike" cap="none">
           <a:solidFill>
             <a:srgbClr val="000000"/>
           </a:solidFill>
-          <a:latin typeface="Arial"/>
-          <a:ea typeface="Arial"/>
-          <a:cs typeface="Arial"/>
-          <a:sym typeface="Arial"/>
+          <a:latin typeface="Arial" panose="020B0604020202020204"/>
+          <a:ea typeface="Arial" panose="020B0604020202020204"/>
+          <a:cs typeface="Arial" panose="020B0604020202020204"/>
+          <a:sym typeface="Arial" panose="020B0604020202020204"/>
         </a:defRPr>
       </a:lvl7pPr>
       <a:lvl8pPr marR="0" lvl="7" algn="l" rtl="0">
@@ -7673,15 +7609,15 @@
         <a:buClr>
           <a:srgbClr val="000000"/>
         </a:buClr>
-        <a:buFont typeface="Arial"/>
+        <a:buFont typeface="Arial" panose="020B0604020202020204"/>
         <a:defRPr sz="1400" b="0" i="0" u="none" strike="noStrike" cap="none">
           <a:solidFill>
             <a:srgbClr val="000000"/>
           </a:solidFill>
-          <a:latin typeface="Arial"/>
-          <a:ea typeface="Arial"/>
-          <a:cs typeface="Arial"/>
-          <a:sym typeface="Arial"/>
+          <a:latin typeface="Arial" panose="020B0604020202020204"/>
+          <a:ea typeface="Arial" panose="020B0604020202020204"/>
+          <a:cs typeface="Arial" panose="020B0604020202020204"/>
+          <a:sym typeface="Arial" panose="020B0604020202020204"/>
         </a:defRPr>
       </a:lvl8pPr>
       <a:lvl9pPr marR="0" lvl="8" algn="l" rtl="0">
@@ -7697,15 +7633,15 @@
         <a:buClr>
           <a:srgbClr val="000000"/>
         </a:buClr>
-        <a:buFont typeface="Arial"/>
+        <a:buFont typeface="Arial" panose="020B0604020202020204"/>
         <a:defRPr sz="1400" b="0" i="0" u="none" strike="noStrike" cap="none">
           <a:solidFill>
             <a:srgbClr val="000000"/>
           </a:solidFill>
-          <a:latin typeface="Arial"/>
-          <a:ea typeface="Arial"/>
-          <a:cs typeface="Arial"/>
-          <a:sym typeface="Arial"/>
+          <a:latin typeface="Arial" panose="020B0604020202020204"/>
+          <a:ea typeface="Arial" panose="020B0604020202020204"/>
+          <a:cs typeface="Arial" panose="020B0604020202020204"/>
+          <a:sym typeface="Arial" panose="020B0604020202020204"/>
         </a:defRPr>
       </a:lvl9pPr>
     </p:titleStyle>
@@ -7734,15 +7670,15 @@
         <a:buClr>
           <a:srgbClr val="000000"/>
         </a:buClr>
-        <a:buFont typeface="Arial"/>
+        <a:buFont typeface="Arial" panose="020B0604020202020204"/>
         <a:defRPr sz="1400" b="0" i="0" u="none" strike="noStrike" cap="none">
           <a:solidFill>
             <a:srgbClr val="000000"/>
           </a:solidFill>
-          <a:latin typeface="Arial"/>
-          <a:ea typeface="Arial"/>
-          <a:cs typeface="Arial"/>
-          <a:sym typeface="Arial"/>
+          <a:latin typeface="Arial" panose="020B0604020202020204"/>
+          <a:ea typeface="Arial" panose="020B0604020202020204"/>
+          <a:cs typeface="Arial" panose="020B0604020202020204"/>
+          <a:sym typeface="Arial" panose="020B0604020202020204"/>
         </a:defRPr>
       </a:lvl1pPr>
       <a:lvl2pPr marR="0" lvl="1" algn="l" rtl="0">
@@ -7758,15 +7694,15 @@
         <a:buClr>
           <a:srgbClr val="000000"/>
         </a:buClr>
-        <a:buFont typeface="Arial"/>
+        <a:buFont typeface="Arial" panose="020B0604020202020204"/>
         <a:defRPr sz="1400" b="0" i="0" u="none" strike="noStrike" cap="none">
           <a:solidFill>
             <a:srgbClr val="000000"/>
           </a:solidFill>
-          <a:latin typeface="Arial"/>
-          <a:ea typeface="Arial"/>
-          <a:cs typeface="Arial"/>
-          <a:sym typeface="Arial"/>
+          <a:latin typeface="Arial" panose="020B0604020202020204"/>
+          <a:ea typeface="Arial" panose="020B0604020202020204"/>
+          <a:cs typeface="Arial" panose="020B0604020202020204"/>
+          <a:sym typeface="Arial" panose="020B0604020202020204"/>
         </a:defRPr>
       </a:lvl2pPr>
       <a:lvl3pPr marR="0" lvl="2" algn="l" rtl="0">
@@ -7782,15 +7718,15 @@
         <a:buClr>
           <a:srgbClr val="000000"/>
         </a:buClr>
-        <a:buFont typeface="Arial"/>
+        <a:buFont typeface="Arial" panose="020B0604020202020204"/>
         <a:defRPr sz="1400" b="0" i="0" u="none" strike="noStrike" cap="none">
           <a:solidFill>
             <a:srgbClr val="000000"/>
           </a:solidFill>
-          <a:latin typeface="Arial"/>
-          <a:ea typeface="Arial"/>
-          <a:cs typeface="Arial"/>
-          <a:sym typeface="Arial"/>
+          <a:latin typeface="Arial" panose="020B0604020202020204"/>
+          <a:ea typeface="Arial" panose="020B0604020202020204"/>
+          <a:cs typeface="Arial" panose="020B0604020202020204"/>
+          <a:sym typeface="Arial" panose="020B0604020202020204"/>
         </a:defRPr>
       </a:lvl3pPr>
       <a:lvl4pPr marR="0" lvl="3" algn="l" rtl="0">
@@ -7806,15 +7742,15 @@
         <a:buClr>
           <a:srgbClr val="000000"/>
         </a:buClr>
-        <a:buFont typeface="Arial"/>
+        <a:buFont typeface="Arial" panose="020B0604020202020204"/>
         <a:defRPr sz="1400" b="0" i="0" u="none" strike="noStrike" cap="none">
           <a:solidFill>
             <a:srgbClr val="000000"/>
           </a:solidFill>
-          <a:latin typeface="Arial"/>
-          <a:ea typeface="Arial"/>
-          <a:cs typeface="Arial"/>
-          <a:sym typeface="Arial"/>
+          <a:latin typeface="Arial" panose="020B0604020202020204"/>
+          <a:ea typeface="Arial" panose="020B0604020202020204"/>
+          <a:cs typeface="Arial" panose="020B0604020202020204"/>
+          <a:sym typeface="Arial" panose="020B0604020202020204"/>
         </a:defRPr>
       </a:lvl4pPr>
       <a:lvl5pPr marR="0" lvl="4" algn="l" rtl="0">
@@ -7830,15 +7766,15 @@
         <a:buClr>
           <a:srgbClr val="000000"/>
         </a:buClr>
-        <a:buFont typeface="Arial"/>
+        <a:buFont typeface="Arial" panose="020B0604020202020204"/>
         <a:defRPr sz="1400" b="0" i="0" u="none" strike="noStrike" cap="none">
           <a:solidFill>
             <a:srgbClr val="000000"/>
           </a:solidFill>
-          <a:latin typeface="Arial"/>
-          <a:ea typeface="Arial"/>
-          <a:cs typeface="Arial"/>
-          <a:sym typeface="Arial"/>
+          <a:latin typeface="Arial" panose="020B0604020202020204"/>
+          <a:ea typeface="Arial" panose="020B0604020202020204"/>
+          <a:cs typeface="Arial" panose="020B0604020202020204"/>
+          <a:sym typeface="Arial" panose="020B0604020202020204"/>
         </a:defRPr>
       </a:lvl5pPr>
       <a:lvl6pPr marR="0" lvl="5" algn="l" rtl="0">
@@ -7854,15 +7790,15 @@
         <a:buClr>
           <a:srgbClr val="000000"/>
         </a:buClr>
-        <a:buFont typeface="Arial"/>
+        <a:buFont typeface="Arial" panose="020B0604020202020204"/>
         <a:defRPr sz="1400" b="0" i="0" u="none" strike="noStrike" cap="none">
           <a:solidFill>
             <a:srgbClr val="000000"/>
           </a:solidFill>
-          <a:latin typeface="Arial"/>
-          <a:ea typeface="Arial"/>
-          <a:cs typeface="Arial"/>
-          <a:sym typeface="Arial"/>
+          <a:latin typeface="Arial" panose="020B0604020202020204"/>
+          <a:ea typeface="Arial" panose="020B0604020202020204"/>
+          <a:cs typeface="Arial" panose="020B0604020202020204"/>
+          <a:sym typeface="Arial" panose="020B0604020202020204"/>
         </a:defRPr>
       </a:lvl6pPr>
       <a:lvl7pPr marR="0" lvl="6" algn="l" rtl="0">
@@ -7878,15 +7814,15 @@
         <a:buClr>
           <a:srgbClr val="000000"/>
         </a:buClr>
-        <a:buFont typeface="Arial"/>
+        <a:buFont typeface="Arial" panose="020B0604020202020204"/>
         <a:defRPr sz="1400" b="0" i="0" u="none" strike="noStrike" cap="none">
           <a:solidFill>
             <a:srgbClr val="000000"/>
           </a:solidFill>
-          <a:latin typeface="Arial"/>
-          <a:ea typeface="Arial"/>
-          <a:cs typeface="Arial"/>
-          <a:sym typeface="Arial"/>
+          <a:latin typeface="Arial" panose="020B0604020202020204"/>
+          <a:ea typeface="Arial" panose="020B0604020202020204"/>
+          <a:cs typeface="Arial" panose="020B0604020202020204"/>
+          <a:sym typeface="Arial" panose="020B0604020202020204"/>
         </a:defRPr>
       </a:lvl7pPr>
       <a:lvl8pPr marR="0" lvl="7" algn="l" rtl="0">
@@ -7902,15 +7838,15 @@
         <a:buClr>
           <a:srgbClr val="000000"/>
         </a:buClr>
-        <a:buFont typeface="Arial"/>
+        <a:buFont typeface="Arial" panose="020B0604020202020204"/>
         <a:defRPr sz="1400" b="0" i="0" u="none" strike="noStrike" cap="none">
           <a:solidFill>
             <a:srgbClr val="000000"/>
           </a:solidFill>
-          <a:latin typeface="Arial"/>
-          <a:ea typeface="Arial"/>
-          <a:cs typeface="Arial"/>
-          <a:sym typeface="Arial"/>
+          <a:latin typeface="Arial" panose="020B0604020202020204"/>
+          <a:ea typeface="Arial" panose="020B0604020202020204"/>
+          <a:cs typeface="Arial" panose="020B0604020202020204"/>
+          <a:sym typeface="Arial" panose="020B0604020202020204"/>
         </a:defRPr>
       </a:lvl8pPr>
       <a:lvl9pPr marR="0" lvl="8" algn="l" rtl="0">
@@ -7926,15 +7862,15 @@
         <a:buClr>
           <a:srgbClr val="000000"/>
         </a:buClr>
-        <a:buFont typeface="Arial"/>
+        <a:buFont typeface="Arial" panose="020B0604020202020204"/>
         <a:defRPr sz="1400" b="0" i="0" u="none" strike="noStrike" cap="none">
           <a:solidFill>
             <a:srgbClr val="000000"/>
           </a:solidFill>
-          <a:latin typeface="Arial"/>
-          <a:ea typeface="Arial"/>
-          <a:cs typeface="Arial"/>
-          <a:sym typeface="Arial"/>
+          <a:latin typeface="Arial" panose="020B0604020202020204"/>
+          <a:ea typeface="Arial" panose="020B0604020202020204"/>
+          <a:cs typeface="Arial" panose="020B0604020202020204"/>
+          <a:sym typeface="Arial" panose="020B0604020202020204"/>
         </a:defRPr>
       </a:lvl9pPr>
     </p:bodyStyle>
@@ -7963,15 +7899,15 @@
         <a:buClr>
           <a:srgbClr val="000000"/>
         </a:buClr>
-        <a:buFont typeface="Arial"/>
+        <a:buFont typeface="Arial" panose="020B0604020202020204"/>
         <a:defRPr sz="1400" b="0" i="0" u="none" strike="noStrike" cap="none">
           <a:solidFill>
             <a:srgbClr val="000000"/>
           </a:solidFill>
-          <a:latin typeface="Arial"/>
-          <a:ea typeface="Arial"/>
-          <a:cs typeface="Arial"/>
-          <a:sym typeface="Arial"/>
+          <a:latin typeface="Arial" panose="020B0604020202020204"/>
+          <a:ea typeface="Arial" panose="020B0604020202020204"/>
+          <a:cs typeface="Arial" panose="020B0604020202020204"/>
+          <a:sym typeface="Arial" panose="020B0604020202020204"/>
         </a:defRPr>
       </a:lvl1pPr>
       <a:lvl2pPr marR="0" lvl="1" algn="l" rtl="0">
@@ -7987,15 +7923,15 @@
         <a:buClr>
           <a:srgbClr val="000000"/>
         </a:buClr>
-        <a:buFont typeface="Arial"/>
+        <a:buFont typeface="Arial" panose="020B0604020202020204"/>
         <a:defRPr sz="1400" b="0" i="0" u="none" strike="noStrike" cap="none">
           <a:solidFill>
             <a:srgbClr val="000000"/>
           </a:solidFill>
-          <a:latin typeface="Arial"/>
-          <a:ea typeface="Arial"/>
-          <a:cs typeface="Arial"/>
-          <a:sym typeface="Arial"/>
+          <a:latin typeface="Arial" panose="020B0604020202020204"/>
+          <a:ea typeface="Arial" panose="020B0604020202020204"/>
+          <a:cs typeface="Arial" panose="020B0604020202020204"/>
+          <a:sym typeface="Arial" panose="020B0604020202020204"/>
         </a:defRPr>
       </a:lvl2pPr>
       <a:lvl3pPr marR="0" lvl="2" algn="l" rtl="0">
@@ -8011,15 +7947,15 @@
         <a:buClr>
           <a:srgbClr val="000000"/>
         </a:buClr>
-        <a:buFont typeface="Arial"/>
+        <a:buFont typeface="Arial" panose="020B0604020202020204"/>
         <a:defRPr sz="1400" b="0" i="0" u="none" strike="noStrike" cap="none">
           <a:solidFill>
             <a:srgbClr val="000000"/>
           </a:solidFill>
-          <a:latin typeface="Arial"/>
-          <a:ea typeface="Arial"/>
-          <a:cs typeface="Arial"/>
-          <a:sym typeface="Arial"/>
+          <a:latin typeface="Arial" panose="020B0604020202020204"/>
+          <a:ea typeface="Arial" panose="020B0604020202020204"/>
+          <a:cs typeface="Arial" panose="020B0604020202020204"/>
+          <a:sym typeface="Arial" panose="020B0604020202020204"/>
         </a:defRPr>
       </a:lvl3pPr>
       <a:lvl4pPr marR="0" lvl="3" algn="l" rtl="0">
@@ -8035,15 +7971,15 @@
         <a:buClr>
           <a:srgbClr val="000000"/>
         </a:buClr>
-        <a:buFont typeface="Arial"/>
+        <a:buFont typeface="Arial" panose="020B0604020202020204"/>
         <a:defRPr sz="1400" b="0" i="0" u="none" strike="noStrike" cap="none">
           <a:solidFill>
             <a:srgbClr val="000000"/>
           </a:solidFill>
-          <a:latin typeface="Arial"/>
-          <a:ea typeface="Arial"/>
-          <a:cs typeface="Arial"/>
-          <a:sym typeface="Arial"/>
+          <a:latin typeface="Arial" panose="020B0604020202020204"/>
+          <a:ea typeface="Arial" panose="020B0604020202020204"/>
+          <a:cs typeface="Arial" panose="020B0604020202020204"/>
+          <a:sym typeface="Arial" panose="020B0604020202020204"/>
         </a:defRPr>
       </a:lvl4pPr>
       <a:lvl5pPr marR="0" lvl="4" algn="l" rtl="0">
@@ -8059,15 +7995,15 @@
         <a:buClr>
           <a:srgbClr val="000000"/>
         </a:buClr>
-        <a:buFont typeface="Arial"/>
+        <a:buFont typeface="Arial" panose="020B0604020202020204"/>
         <a:defRPr sz="1400" b="0" i="0" u="none" strike="noStrike" cap="none">
           <a:solidFill>
             <a:srgbClr val="000000"/>
           </a:solidFill>
-          <a:latin typeface="Arial"/>
-          <a:ea typeface="Arial"/>
-          <a:cs typeface="Arial"/>
-          <a:sym typeface="Arial"/>
+          <a:latin typeface="Arial" panose="020B0604020202020204"/>
+          <a:ea typeface="Arial" panose="020B0604020202020204"/>
+          <a:cs typeface="Arial" panose="020B0604020202020204"/>
+          <a:sym typeface="Arial" panose="020B0604020202020204"/>
         </a:defRPr>
       </a:lvl5pPr>
       <a:lvl6pPr marR="0" lvl="5" algn="l" rtl="0">
@@ -8083,15 +8019,15 @@
         <a:buClr>
           <a:srgbClr val="000000"/>
         </a:buClr>
-        <a:buFont typeface="Arial"/>
+        <a:buFont typeface="Arial" panose="020B0604020202020204"/>
         <a:defRPr sz="1400" b="0" i="0" u="none" strike="noStrike" cap="none">
           <a:solidFill>
             <a:srgbClr val="000000"/>
           </a:solidFill>
-          <a:latin typeface="Arial"/>
-          <a:ea typeface="Arial"/>
-          <a:cs typeface="Arial"/>
-          <a:sym typeface="Arial"/>
+          <a:latin typeface="Arial" panose="020B0604020202020204"/>
+          <a:ea typeface="Arial" panose="020B0604020202020204"/>
+          <a:cs typeface="Arial" panose="020B0604020202020204"/>
+          <a:sym typeface="Arial" panose="020B0604020202020204"/>
         </a:defRPr>
       </a:lvl6pPr>
       <a:lvl7pPr marR="0" lvl="6" algn="l" rtl="0">
@@ -8107,15 +8043,15 @@
         <a:buClr>
           <a:srgbClr val="000000"/>
         </a:buClr>
-        <a:buFont typeface="Arial"/>
+        <a:buFont typeface="Arial" panose="020B0604020202020204"/>
         <a:defRPr sz="1400" b="0" i="0" u="none" strike="noStrike" cap="none">
           <a:solidFill>
             <a:srgbClr val="000000"/>
           </a:solidFill>
-          <a:latin typeface="Arial"/>
-          <a:ea typeface="Arial"/>
-          <a:cs typeface="Arial"/>
-          <a:sym typeface="Arial"/>
+          <a:latin typeface="Arial" panose="020B0604020202020204"/>
+          <a:ea typeface="Arial" panose="020B0604020202020204"/>
+          <a:cs typeface="Arial" panose="020B0604020202020204"/>
+          <a:sym typeface="Arial" panose="020B0604020202020204"/>
         </a:defRPr>
       </a:lvl7pPr>
       <a:lvl8pPr marR="0" lvl="7" algn="l" rtl="0">
@@ -8131,15 +8067,15 @@
         <a:buClr>
           <a:srgbClr val="000000"/>
         </a:buClr>
-        <a:buFont typeface="Arial"/>
+        <a:buFont typeface="Arial" panose="020B0604020202020204"/>
         <a:defRPr sz="1400" b="0" i="0" u="none" strike="noStrike" cap="none">
           <a:solidFill>
             <a:srgbClr val="000000"/>
           </a:solidFill>
-          <a:latin typeface="Arial"/>
-          <a:ea typeface="Arial"/>
-          <a:cs typeface="Arial"/>
-          <a:sym typeface="Arial"/>
+          <a:latin typeface="Arial" panose="020B0604020202020204"/>
+          <a:ea typeface="Arial" panose="020B0604020202020204"/>
+          <a:cs typeface="Arial" panose="020B0604020202020204"/>
+          <a:sym typeface="Arial" panose="020B0604020202020204"/>
         </a:defRPr>
       </a:lvl8pPr>
       <a:lvl9pPr marR="0" lvl="8" algn="l" rtl="0">
@@ -8155,15 +8091,15 @@
         <a:buClr>
           <a:srgbClr val="000000"/>
         </a:buClr>
-        <a:buFont typeface="Arial"/>
+        <a:buFont typeface="Arial" panose="020B0604020202020204"/>
         <a:defRPr sz="1400" b="0" i="0" u="none" strike="noStrike" cap="none">
           <a:solidFill>
             <a:srgbClr val="000000"/>
           </a:solidFill>
-          <a:latin typeface="Arial"/>
-          <a:ea typeface="Arial"/>
-          <a:cs typeface="Arial"/>
-          <a:sym typeface="Arial"/>
+          <a:latin typeface="Arial" panose="020B0604020202020204"/>
+          <a:ea typeface="Arial" panose="020B0604020202020204"/>
+          <a:cs typeface="Arial" panose="020B0604020202020204"/>
+          <a:sym typeface="Arial" panose="020B0604020202020204"/>
         </a:defRPr>
       </a:lvl9pPr>
     </p:otherStyle>
@@ -8223,10 +8159,10 @@
               <a:buNone/>
             </a:pPr>
             <a:r>
-              <a:rPr lang="en"/>
+              <a:rPr lang="en-GB"/>
               <a:t>Data Structures: Objects and Arrays</a:t>
             </a:r>
-            <a:endParaRPr/>
+            <a:endParaRPr lang="en-GB"/>
           </a:p>
         </p:txBody>
       </p:sp>
@@ -8264,7 +8200,6 @@
               </a:spcAft>
               <a:buNone/>
             </a:pPr>
-            <a:endParaRPr/>
           </a:p>
         </p:txBody>
       </p:sp>
@@ -8277,6 +8212,158 @@
 </file>
 
 <file path=ppt/slides/slide10.xml><?xml version="1.0" encoding="utf-8"?>
+<p:sld xmlns:a="http://schemas.openxmlformats.org/drawingml/2006/main" xmlns:r="http://schemas.openxmlformats.org/officeDocument/2006/relationships" xmlns:p="http://schemas.openxmlformats.org/presentationml/2006/main">
+  <p:cSld>
+    <p:spTree>
+      <p:nvGrpSpPr>
+        <p:cNvPr id="1" name="Shape 133"/>
+        <p:cNvGrpSpPr/>
+        <p:nvPr/>
+      </p:nvGrpSpPr>
+      <p:grpSpPr>
+        <a:xfrm>
+          <a:off x="0" y="0"/>
+          <a:ext cx="0" cy="0"/>
+          <a:chOff x="0" y="0"/>
+          <a:chExt cx="0" cy="0"/>
+        </a:xfrm>
+      </p:grpSpPr>
+      <p:sp>
+        <p:nvSpPr>
+          <p:cNvPr id="134" name="Google Shape;134;p21"/>
+          <p:cNvSpPr txBox="1">
+            <a:spLocks noGrp="1"/>
+          </p:cNvSpPr>
+          <p:nvPr>
+            <p:ph type="title"/>
+          </p:nvPr>
+        </p:nvSpPr>
+        <p:spPr>
+          <a:xfrm>
+            <a:off x="729450" y="1318650"/>
+            <a:ext cx="7688700" cy="535200"/>
+          </a:xfrm>
+          <a:prstGeom prst="rect">
+            <a:avLst/>
+          </a:prstGeom>
+        </p:spPr>
+        <p:txBody>
+          <a:bodyPr spcFirstLastPara="1" wrap="square" lIns="91425" tIns="91425" rIns="91425" bIns="91425" anchor="t" anchorCtr="0">
+            <a:normAutofit fontScale="90000"/>
+          </a:bodyPr>
+          <a:lstStyle/>
+          <a:p>
+            <a:pPr marL="0" lvl="0" indent="0" algn="l" rtl="0">
+              <a:spcBef>
+                <a:spcPts val="0"/>
+              </a:spcBef>
+              <a:spcAft>
+                <a:spcPts val="0"/>
+              </a:spcAft>
+              <a:buNone/>
+            </a:pPr>
+            <a:r>
+              <a:rPr lang="en-GB"/>
+              <a:t>Looping Through Objects	</a:t>
+            </a:r>
+            <a:endParaRPr lang="en-GB"/>
+          </a:p>
+        </p:txBody>
+      </p:sp>
+      <p:sp>
+        <p:nvSpPr>
+          <p:cNvPr id="135" name="Google Shape;135;p21"/>
+          <p:cNvSpPr txBox="1">
+            <a:spLocks noGrp="1"/>
+          </p:cNvSpPr>
+          <p:nvPr>
+            <p:ph type="body" idx="1"/>
+          </p:nvPr>
+        </p:nvSpPr>
+        <p:spPr>
+          <a:xfrm>
+            <a:off x="729450" y="2078875"/>
+            <a:ext cx="7688700" cy="2261100"/>
+          </a:xfrm>
+          <a:prstGeom prst="rect">
+            <a:avLst/>
+          </a:prstGeom>
+        </p:spPr>
+        <p:txBody>
+          <a:bodyPr spcFirstLastPara="1" wrap="square" lIns="91425" tIns="91425" rIns="91425" bIns="91425" anchor="t" anchorCtr="0">
+            <a:normAutofit/>
+          </a:bodyPr>
+          <a:lstStyle/>
+          <a:p>
+            <a:pPr marL="0" lvl="0" indent="0" algn="l" rtl="0">
+              <a:spcBef>
+                <a:spcPts val="0"/>
+              </a:spcBef>
+              <a:spcAft>
+                <a:spcPts val="0"/>
+              </a:spcAft>
+              <a:buNone/>
+            </a:pPr>
+            <a:r>
+              <a:rPr lang="en-GB"/>
+              <a:t>for (let key in student) {</a:t>
+            </a:r>
+            <a:endParaRPr lang="en-GB"/>
+          </a:p>
+          <a:p>
+            <a:pPr marL="0" lvl="0" indent="0" algn="l" rtl="0">
+              <a:spcBef>
+                <a:spcPts val="1200"/>
+              </a:spcBef>
+              <a:spcAft>
+                <a:spcPts val="0"/>
+              </a:spcAft>
+              <a:buNone/>
+            </a:pPr>
+            <a:r>
+              <a:rPr lang="en-GB"/>
+              <a:t>  console.log(key + ": " + student[key]);</a:t>
+            </a:r>
+            <a:endParaRPr lang="en-GB"/>
+          </a:p>
+          <a:p>
+            <a:pPr marL="0" lvl="0" indent="0" algn="l" rtl="0">
+              <a:spcBef>
+                <a:spcPts val="1200"/>
+              </a:spcBef>
+              <a:spcAft>
+                <a:spcPts val="0"/>
+              </a:spcAft>
+              <a:buNone/>
+            </a:pPr>
+            <a:r>
+              <a:rPr lang="en-GB"/>
+              <a:t>}</a:t>
+            </a:r>
+            <a:endParaRPr lang="en-GB"/>
+          </a:p>
+          <a:p>
+            <a:pPr marL="0" lvl="0" indent="0" algn="l" rtl="0">
+              <a:spcBef>
+                <a:spcPts val="1200"/>
+              </a:spcBef>
+              <a:spcAft>
+                <a:spcPts val="1200"/>
+              </a:spcAft>
+              <a:buNone/>
+            </a:pPr>
+          </a:p>
+        </p:txBody>
+      </p:sp>
+    </p:spTree>
+  </p:cSld>
+  <p:clrMapOvr>
+    <a:masterClrMapping/>
+  </p:clrMapOvr>
+</p:sld>
+</file>
+
+<file path=ppt/slides/slide11.xml><?xml version="1.0" encoding="utf-8"?>
 <p:sld xmlns:a="http://schemas.openxmlformats.org/drawingml/2006/main" xmlns:r="http://schemas.openxmlformats.org/officeDocument/2006/relationships" xmlns:p="http://schemas.openxmlformats.org/presentationml/2006/main">
   <p:cSld>
     <p:spTree>
@@ -8295,13 +8382,7 @@
       </p:grpSpPr>
       <p:sp>
         <p:nvSpPr>
-          <p:cNvPr id="2" name="Заголовок 1">
-            <a:extLst>
-              <a:ext uri="{FF2B5EF4-FFF2-40B4-BE49-F238E27FC236}">
-                <a16:creationId xmlns:a16="http://schemas.microsoft.com/office/drawing/2014/main" id="{D9C913A5-184A-415F-93BF-88316C2D5FF1}"/>
-              </a:ext>
-            </a:extLst>
-          </p:cNvPr>
+          <p:cNvPr id="2" name="Заголовок 1"/>
           <p:cNvSpPr>
             <a:spLocks noGrp="1"/>
           </p:cNvSpPr>
@@ -8322,13 +8403,7 @@
       </p:sp>
       <p:sp>
         <p:nvSpPr>
-          <p:cNvPr id="3" name="Текст 2">
-            <a:extLst>
-              <a:ext uri="{FF2B5EF4-FFF2-40B4-BE49-F238E27FC236}">
-                <a16:creationId xmlns:a16="http://schemas.microsoft.com/office/drawing/2014/main" id="{FD54C728-BEE9-4EC5-90FB-5A9944C12D09}"/>
-              </a:ext>
-            </a:extLst>
-          </p:cNvPr>
+          <p:cNvPr id="3" name="Текст 2"/>
           <p:cNvSpPr>
             <a:spLocks noGrp="1"/>
           </p:cNvSpPr>
@@ -8341,34 +8416,54 @@
           <a:bodyPr/>
           <a:lstStyle/>
           <a:p>
+            <a:pPr marL="146050" indent="0">
+              <a:buNone/>
+            </a:pPr>
             <a:r>
               <a:rPr lang="en-US" dirty="0"/>
               <a:t>const students = {</a:t>
             </a:r>
+            <a:endParaRPr lang="en-US" dirty="0"/>
           </a:p>
           <a:p>
+            <a:pPr marL="603250" lvl="1" indent="0">
+              <a:buNone/>
+            </a:pPr>
             <a:r>
               <a:rPr lang="en-US" dirty="0"/>
-              <a:t>  student1: { id: 1, name: "Alice" },</a:t>
+              <a:t>student1: { id: 1, name: "Alice" },</a:t>
             </a:r>
+            <a:endParaRPr lang="en-US" dirty="0"/>
           </a:p>
           <a:p>
+            <a:pPr marL="603250" lvl="1" indent="0">
+              <a:buNone/>
+            </a:pPr>
             <a:r>
               <a:rPr lang="en-US" dirty="0"/>
-              <a:t>  student2: { id: 2, name: "Bob" },</a:t>
+              <a:t> student2: { id: 2, name: "Bob" },</a:t>
             </a:r>
+            <a:endParaRPr lang="en-US" dirty="0"/>
           </a:p>
           <a:p>
+            <a:pPr marL="603250" lvl="1" indent="0">
+              <a:buNone/>
+            </a:pPr>
             <a:r>
               <a:rPr lang="en-US" dirty="0"/>
-              <a:t>  student3: { id: 3, name: "Charlie" }</a:t>
+              <a:t> student3: { id: 3, name: "Charlie" }</a:t>
             </a:r>
+            <a:endParaRPr lang="en-US" dirty="0"/>
           </a:p>
           <a:p>
+            <a:pPr marL="146050" indent="0">
+              <a:buNone/>
+            </a:pPr>
             <a:r>
               <a:rPr lang="en-US" dirty="0"/>
               <a:t>};</a:t>
             </a:r>
+            <a:endParaRPr lang="en-US" dirty="0"/>
           </a:p>
           <a:p>
             <a:endParaRPr lang="en-US" dirty="0"/>
@@ -8378,6 +8473,7 @@
               <a:rPr lang="en-US" dirty="0"/>
               <a:t>console.log(students);</a:t>
             </a:r>
+            <a:endParaRPr lang="en-US" dirty="0"/>
           </a:p>
           <a:p>
             <a:endParaRPr lang="ru-RU" dirty="0"/>
@@ -8385,11 +8481,6 @@
         </p:txBody>
       </p:sp>
     </p:spTree>
-    <p:extLst>
-      <p:ext uri="{BB962C8B-B14F-4D97-AF65-F5344CB8AC3E}">
-        <p14:creationId xmlns:p14="http://schemas.microsoft.com/office/powerpoint/2010/main" val="3237577864"/>
-      </p:ext>
-    </p:extLst>
   </p:cSld>
   <p:clrMapOvr>
     <a:masterClrMapping/>
@@ -8397,7 +8488,7 @@
 </p:sld>
 </file>
 
-<file path=ppt/slides/slide11.xml><?xml version="1.0" encoding="utf-8"?>
+<file path=ppt/slides/slide12.xml><?xml version="1.0" encoding="utf-8"?>
 <p:sld xmlns:a="http://schemas.openxmlformats.org/drawingml/2006/main" xmlns:r="http://schemas.openxmlformats.org/officeDocument/2006/relationships" xmlns:p="http://schemas.openxmlformats.org/presentationml/2006/main">
   <p:cSld>
     <p:spTree>
@@ -8449,10 +8540,10 @@
               <a:buNone/>
             </a:pPr>
             <a:r>
-              <a:rPr lang="en"/>
+              <a:rPr lang="en-GB"/>
               <a:t>Task	</a:t>
             </a:r>
-            <a:endParaRPr/>
+            <a:endParaRPr lang="en-GB"/>
           </a:p>
         </p:txBody>
       </p:sp>
@@ -8477,7 +8568,7 @@
         </p:spPr>
         <p:txBody>
           <a:bodyPr spcFirstLastPara="1" wrap="square" lIns="91425" tIns="91425" rIns="91425" bIns="91425" anchor="t" anchorCtr="0">
-            <a:normAutofit lnSpcReduction="10000"/>
+            <a:normAutofit fontScale="70000"/>
           </a:bodyPr>
           <a:lstStyle/>
           <a:p>
@@ -8491,10 +8582,10 @@
               <a:buNone/>
             </a:pPr>
             <a:r>
-              <a:rPr lang="en"/>
+              <a:rPr lang="en-GB"/>
               <a:t>Create an object that holds a list of 10 student names.</a:t>
             </a:r>
-            <a:endParaRPr/>
+            <a:endParaRPr lang="en-GB"/>
           </a:p>
           <a:p>
             <a:pPr marL="0" lvl="0" indent="0" algn="l" rtl="0">
@@ -8507,10 +8598,10 @@
               <a:buNone/>
             </a:pPr>
             <a:r>
-              <a:rPr lang="en"/>
+              <a:rPr lang="en-GB"/>
               <a:t>Loop through the object and calculate the length of each student’s name (the number of characters).</a:t>
             </a:r>
-            <a:endParaRPr/>
+            <a:endParaRPr lang="en-GB"/>
           </a:p>
           <a:p>
             <a:pPr marL="0" lvl="0" indent="0" algn="l" rtl="0">
@@ -8523,10 +8614,10 @@
               <a:buNone/>
             </a:pPr>
             <a:r>
-              <a:rPr lang="en"/>
-              <a:t>Output the name and its length.</a:t>
+              <a:rPr lang="en-US" altLang="en-GB"/>
+              <a:t>print the longest name</a:t>
             </a:r>
-            <a:endParaRPr/>
+            <a:endParaRPr lang="en-GB"/>
           </a:p>
           <a:p>
             <a:pPr marL="0" lvl="0" indent="0" algn="l" rtl="0">
@@ -8539,7 +8630,23 @@
               <a:buNone/>
             </a:pPr>
             <a:r>
-              <a:rPr lang="en">
+              <a:rPr lang="en-GB"/>
+              <a:t>Output the name and its length.</a:t>
+            </a:r>
+            <a:endParaRPr lang="en-GB"/>
+          </a:p>
+          <a:p>
+            <a:pPr marL="0" lvl="0" indent="0" algn="l" rtl="0">
+              <a:spcBef>
+                <a:spcPts val="1200"/>
+              </a:spcBef>
+              <a:spcAft>
+                <a:spcPts val="0"/>
+              </a:spcAft>
+              <a:buNone/>
+            </a:pPr>
+            <a:r>
+              <a:rPr lang="en-GB">
                 <a:solidFill>
                   <a:srgbClr val="FF0000"/>
                 </a:solidFill>
@@ -8563,7 +8670,7 @@
               <a:buNone/>
             </a:pPr>
             <a:r>
-              <a:rPr lang="en">
+              <a:rPr lang="en-GB">
                 <a:solidFill>
                   <a:srgbClr val="FF0000"/>
                 </a:solidFill>
@@ -8587,7 +8694,7 @@
               <a:buNone/>
             </a:pPr>
             <a:r>
-              <a:rPr lang="en">
+              <a:rPr lang="en-GB">
                 <a:solidFill>
                   <a:srgbClr val="FF0000"/>
                 </a:solidFill>
@@ -8610,7 +8717,6 @@
               </a:spcAft>
               <a:buNone/>
             </a:pPr>
-            <a:endParaRPr/>
           </a:p>
         </p:txBody>
       </p:sp>
@@ -8649,14 +8755,14 @@
               <a:buNone/>
             </a:pPr>
             <a:r>
-              <a:rPr lang="en" sz="1300">
+              <a:rPr lang="en-GB" sz="1300">
                 <a:solidFill>
                   <a:srgbClr val="0000FF"/>
                 </a:solidFill>
-                <a:latin typeface="Lato"/>
-                <a:ea typeface="Lato"/>
-                <a:cs typeface="Lato"/>
-                <a:sym typeface="Lato"/>
+                <a:latin typeface="Lato" panose="020F0502020204030203"/>
+                <a:ea typeface="Lato" panose="020F0502020204030203"/>
+                <a:cs typeface="Lato" panose="020F0502020204030203"/>
+                <a:sym typeface="Lato" panose="020F0502020204030203"/>
               </a:rPr>
               <a:t>Let students = [Mirbek, Sadyr];</a:t>
             </a:r>
@@ -8664,10 +8770,10 @@
               <a:solidFill>
                 <a:srgbClr val="0000FF"/>
               </a:solidFill>
-              <a:latin typeface="Lato"/>
-              <a:ea typeface="Lato"/>
-              <a:cs typeface="Lato"/>
-              <a:sym typeface="Lato"/>
+              <a:latin typeface="Lato" panose="020F0502020204030203"/>
+              <a:ea typeface="Lato" panose="020F0502020204030203"/>
+              <a:cs typeface="Lato" panose="020F0502020204030203"/>
+              <a:sym typeface="Lato" panose="020F0502020204030203"/>
             </a:endParaRPr>
           </a:p>
         </p:txBody>
@@ -8732,10 +8838,10 @@
               <a:buNone/>
             </a:pPr>
             <a:r>
-              <a:rPr lang="en"/>
+              <a:rPr lang="en-GB"/>
               <a:t>What Are Data Structures?</a:t>
             </a:r>
-            <a:endParaRPr/>
+            <a:endParaRPr lang="en-GB"/>
           </a:p>
         </p:txBody>
       </p:sp>
@@ -8774,10 +8880,10 @@
               <a:buNone/>
             </a:pPr>
             <a:r>
-              <a:rPr lang="en"/>
+              <a:rPr lang="en-GB"/>
               <a:t>Data structures are different ways to organize and store data in a programming language. They allow us to manage data efficiently, ensuring that we can access and manipulate it easily</a:t>
             </a:r>
-            <a:endParaRPr/>
+            <a:endParaRPr lang="en-GB"/>
           </a:p>
           <a:p>
             <a:pPr marL="0" lvl="0" indent="0" algn="l" rtl="0">
@@ -8789,7 +8895,6 @@
               </a:spcAft>
               <a:buNone/>
             </a:pPr>
-            <a:endParaRPr/>
           </a:p>
           <a:p>
             <a:pPr marL="0" lvl="0" indent="0" algn="l" rtl="0">
@@ -8802,14 +8907,14 @@
               <a:buNone/>
             </a:pPr>
             <a:r>
-              <a:rPr lang="en" b="1"/>
+              <a:rPr lang="en-GB" b="1"/>
               <a:t>Arrays and Objects.</a:t>
             </a:r>
             <a:r>
-              <a:rPr lang="en"/>
+              <a:rPr lang="en-GB"/>
               <a:t> These structures allow us to store, retrieve, and manipulate data in different ways</a:t>
             </a:r>
-            <a:endParaRPr/>
+            <a:endParaRPr lang="en-GB"/>
           </a:p>
         </p:txBody>
       </p:sp>
@@ -8873,10 +8978,10 @@
               <a:buNone/>
             </a:pPr>
             <a:r>
-              <a:rPr lang="en"/>
+              <a:rPr lang="en-GB"/>
               <a:t> Introduction to Arrays</a:t>
             </a:r>
-            <a:endParaRPr/>
+            <a:endParaRPr lang="en-GB"/>
           </a:p>
         </p:txBody>
       </p:sp>
@@ -8915,10 +9020,10 @@
               <a:buNone/>
             </a:pPr>
             <a:r>
-              <a:rPr lang="en"/>
+              <a:rPr lang="en-GB"/>
               <a:t>An array is a list-like structure that allows us to store multiple values in a single variable. Each value is stored at a specific index, which we can use to retrieve or modify it later</a:t>
             </a:r>
-            <a:endParaRPr/>
+            <a:endParaRPr lang="en-GB"/>
           </a:p>
           <a:p>
             <a:pPr marL="0" lvl="0" indent="0" algn="l" rtl="0">
@@ -8930,7 +9035,6 @@
               </a:spcAft>
               <a:buNone/>
             </a:pPr>
-            <a:endParaRPr/>
           </a:p>
           <a:p>
             <a:pPr marL="0" lvl="0" indent="0" algn="l" rtl="0">
@@ -8943,7 +9047,7 @@
               <a:buNone/>
             </a:pPr>
             <a:r>
-              <a:rPr lang="en">
+              <a:rPr lang="en-US" altLang="en-GB">
                 <a:solidFill>
                   <a:schemeClr val="lt1"/>
                 </a:solidFill>
@@ -8951,7 +9055,18 @@
                   <a:schemeClr val="accent1"/>
                 </a:highlight>
               </a:rPr>
-              <a:t>Let arr = [1,2,7,3,4,5]</a:t>
+              <a:t>l</a:t>
+            </a:r>
+            <a:r>
+              <a:rPr lang="en-GB">
+                <a:solidFill>
+                  <a:schemeClr val="lt1"/>
+                </a:solidFill>
+                <a:highlight>
+                  <a:schemeClr val="accent1"/>
+                </a:highlight>
+              </a:rPr>
+              <a:t>et arr = [1,2,7,3,4,5]</a:t>
             </a:r>
             <a:endParaRPr>
               <a:solidFill>
@@ -9024,10 +9139,10 @@
               <a:buNone/>
             </a:pPr>
             <a:r>
-              <a:rPr lang="en"/>
+              <a:rPr lang="en-GB"/>
               <a:t>Working with Arrays</a:t>
             </a:r>
-            <a:endParaRPr/>
+            <a:endParaRPr lang="en-GB"/>
           </a:p>
         </p:txBody>
       </p:sp>
@@ -9066,7 +9181,7 @@
               <a:buNone/>
             </a:pPr>
             <a:r>
-              <a:rPr lang="en">
+              <a:rPr lang="en-GB">
                 <a:solidFill>
                   <a:schemeClr val="lt1"/>
                 </a:solidFill>
@@ -9077,10 +9192,10 @@
               <a:t>push()</a:t>
             </a:r>
             <a:r>
-              <a:rPr lang="en"/>
+              <a:rPr lang="en-GB"/>
               <a:t>  /*add new element at the end of array */</a:t>
             </a:r>
-            <a:endParaRPr/>
+            <a:endParaRPr lang="en-GB"/>
           </a:p>
           <a:p>
             <a:pPr marL="0" lvl="0" indent="0" algn="l" rtl="0">
@@ -9093,7 +9208,7 @@
               <a:buNone/>
             </a:pPr>
             <a:r>
-              <a:rPr lang="en">
+              <a:rPr lang="en-GB">
                 <a:solidFill>
                   <a:schemeClr val="lt1"/>
                 </a:solidFill>
@@ -9104,10 +9219,10 @@
               <a:t>pop() </a:t>
             </a:r>
             <a:r>
-              <a:rPr lang="en"/>
+              <a:rPr lang="en-GB"/>
               <a:t> /*remove last element at the end of array */</a:t>
             </a:r>
-            <a:endParaRPr/>
+            <a:endParaRPr lang="en-GB"/>
           </a:p>
           <a:p>
             <a:pPr marL="0" lvl="0" indent="0" algn="l" rtl="0">
@@ -9119,7 +9234,6 @@
               </a:spcAft>
               <a:buNone/>
             </a:pPr>
-            <a:endParaRPr/>
           </a:p>
           <a:p>
             <a:pPr marL="0" lvl="0" indent="0" algn="l" rtl="0">
@@ -9132,11 +9246,11 @@
               <a:buNone/>
             </a:pPr>
             <a:r>
-              <a:rPr lang="en"/>
+              <a:rPr lang="en-GB"/>
               <a:t>Additionally, we can loop through arrays using the </a:t>
             </a:r>
             <a:r>
-              <a:rPr lang="en">
+              <a:rPr lang="en-GB">
                 <a:solidFill>
                   <a:schemeClr val="lt1"/>
                 </a:solidFill>
@@ -9147,11 +9261,11 @@
               <a:t>for loop</a:t>
             </a:r>
             <a:r>
-              <a:rPr lang="en"/>
+              <a:rPr lang="en-GB"/>
               <a:t> or the</a:t>
             </a:r>
             <a:r>
-              <a:rPr lang="en">
+              <a:rPr lang="en-GB">
                 <a:solidFill>
                   <a:schemeClr val="lt1"/>
                 </a:solidFill>
@@ -9162,10 +9276,10 @@
               <a:t> forEach()</a:t>
             </a:r>
             <a:r>
-              <a:rPr lang="en"/>
+              <a:rPr lang="en-GB"/>
               <a:t> method to perform an action on each item."</a:t>
             </a:r>
-            <a:endParaRPr/>
+            <a:endParaRPr lang="en-GB"/>
           </a:p>
           <a:p>
             <a:pPr marL="0" lvl="0" indent="0" algn="l" rtl="0">
@@ -9177,7 +9291,6 @@
               </a:spcAft>
               <a:buNone/>
             </a:pPr>
-            <a:endParaRPr/>
           </a:p>
         </p:txBody>
       </p:sp>
@@ -9190,6 +9303,221 @@
 </file>
 
 <file path=ppt/slides/slide5.xml><?xml version="1.0" encoding="utf-8"?>
+<p:sld xmlns:a="http://schemas.openxmlformats.org/drawingml/2006/main" xmlns:r="http://schemas.openxmlformats.org/officeDocument/2006/relationships" xmlns:p="http://schemas.openxmlformats.org/presentationml/2006/main">
+  <p:cSld>
+    <p:spTree>
+      <p:nvGrpSpPr>
+        <p:cNvPr id="1" name="Shape 103"/>
+        <p:cNvGrpSpPr/>
+        <p:nvPr/>
+      </p:nvGrpSpPr>
+      <p:grpSpPr>
+        <a:xfrm>
+          <a:off x="0" y="0"/>
+          <a:ext cx="0" cy="0"/>
+          <a:chOff x="0" y="0"/>
+          <a:chExt cx="0" cy="0"/>
+        </a:xfrm>
+      </p:grpSpPr>
+      <p:sp>
+        <p:nvSpPr>
+          <p:cNvPr id="104" name="Google Shape;104;p16"/>
+          <p:cNvSpPr txBox="1">
+            <a:spLocks noGrp="1"/>
+          </p:cNvSpPr>
+          <p:nvPr>
+            <p:ph type="title"/>
+          </p:nvPr>
+        </p:nvSpPr>
+        <p:spPr>
+          <a:xfrm>
+            <a:off x="729450" y="1318650"/>
+            <a:ext cx="7688700" cy="535200"/>
+          </a:xfrm>
+          <a:prstGeom prst="rect">
+            <a:avLst/>
+          </a:prstGeom>
+        </p:spPr>
+        <p:txBody>
+          <a:bodyPr spcFirstLastPara="1" wrap="square" lIns="91425" tIns="91425" rIns="91425" bIns="91425" anchor="t" anchorCtr="0">
+            <a:normAutofit fontScale="90000"/>
+          </a:bodyPr>
+          <a:lstStyle/>
+          <a:p>
+            <a:pPr marL="0" lvl="0" indent="0" algn="l" rtl="0">
+              <a:spcBef>
+                <a:spcPts val="0"/>
+              </a:spcBef>
+              <a:spcAft>
+                <a:spcPts val="0"/>
+              </a:spcAft>
+              <a:buNone/>
+            </a:pPr>
+            <a:r>
+              <a:rPr lang="en-GB"/>
+              <a:t>Working with Arrays</a:t>
+            </a:r>
+            <a:endParaRPr lang="en-GB"/>
+          </a:p>
+        </p:txBody>
+      </p:sp>
+      <p:sp>
+        <p:nvSpPr>
+          <p:cNvPr id="105" name="Google Shape;105;p16"/>
+          <p:cNvSpPr txBox="1">
+            <a:spLocks noGrp="1"/>
+          </p:cNvSpPr>
+          <p:nvPr>
+            <p:ph type="body" idx="1"/>
+          </p:nvPr>
+        </p:nvSpPr>
+        <p:spPr>
+          <a:xfrm>
+            <a:off x="729450" y="2078875"/>
+            <a:ext cx="7688700" cy="2261100"/>
+          </a:xfrm>
+          <a:prstGeom prst="rect">
+            <a:avLst/>
+          </a:prstGeom>
+        </p:spPr>
+        <p:txBody>
+          <a:bodyPr spcFirstLastPara="1" wrap="square" lIns="91425" tIns="91425" rIns="91425" bIns="91425" anchor="t" anchorCtr="0">
+            <a:normAutofit/>
+          </a:bodyPr>
+          <a:lstStyle/>
+          <a:p>
+            <a:pPr marL="0" lvl="0" indent="0" algn="l" rtl="0">
+              <a:spcBef>
+                <a:spcPts val="0"/>
+              </a:spcBef>
+              <a:spcAft>
+                <a:spcPts val="0"/>
+              </a:spcAft>
+              <a:buNone/>
+            </a:pPr>
+            <a:r>
+              <a:rPr lang="en-GB">
+                <a:solidFill>
+                  <a:schemeClr val="lt1"/>
+                </a:solidFill>
+                <a:highlight>
+                  <a:schemeClr val="accent1"/>
+                </a:highlight>
+              </a:rPr>
+              <a:t>push()</a:t>
+            </a:r>
+            <a:r>
+              <a:rPr lang="en-GB"/>
+              <a:t>  /*add new element at the end of array */</a:t>
+            </a:r>
+            <a:endParaRPr lang="en-GB"/>
+          </a:p>
+          <a:p>
+            <a:pPr marL="0" lvl="0" indent="0" algn="l" rtl="0">
+              <a:spcBef>
+                <a:spcPts val="1200"/>
+              </a:spcBef>
+              <a:spcAft>
+                <a:spcPts val="0"/>
+              </a:spcAft>
+              <a:buNone/>
+            </a:pPr>
+            <a:r>
+              <a:rPr lang="en-GB">
+                <a:solidFill>
+                  <a:schemeClr val="lt1"/>
+                </a:solidFill>
+                <a:highlight>
+                  <a:schemeClr val="accent1"/>
+                </a:highlight>
+              </a:rPr>
+              <a:t>pop() </a:t>
+            </a:r>
+            <a:r>
+              <a:rPr lang="en-GB"/>
+              <a:t> /*remove last element at the end of array */</a:t>
+            </a:r>
+            <a:endParaRPr lang="en-GB"/>
+          </a:p>
+          <a:p>
+            <a:pPr marL="0" lvl="0" indent="0" algn="l" rtl="0">
+              <a:spcBef>
+                <a:spcPts val="1200"/>
+              </a:spcBef>
+              <a:spcAft>
+                <a:spcPts val="0"/>
+              </a:spcAft>
+              <a:buNone/>
+            </a:pPr>
+          </a:p>
+          <a:p>
+            <a:pPr marL="0" lvl="0" indent="0" algn="l" rtl="0">
+              <a:spcBef>
+                <a:spcPts val="1200"/>
+              </a:spcBef>
+              <a:spcAft>
+                <a:spcPts val="0"/>
+              </a:spcAft>
+              <a:buNone/>
+            </a:pPr>
+            <a:r>
+              <a:rPr lang="en-GB"/>
+              <a:t>Additionally, we can loop through arrays using the </a:t>
+            </a:r>
+            <a:r>
+              <a:rPr lang="en-GB">
+                <a:solidFill>
+                  <a:schemeClr val="lt1"/>
+                </a:solidFill>
+                <a:highlight>
+                  <a:schemeClr val="accent1"/>
+                </a:highlight>
+              </a:rPr>
+              <a:t>for loop</a:t>
+            </a:r>
+            <a:r>
+              <a:rPr lang="en-GB"/>
+              <a:t> or the</a:t>
+            </a:r>
+            <a:r>
+              <a:rPr lang="en-GB">
+                <a:solidFill>
+                  <a:schemeClr val="lt1"/>
+                </a:solidFill>
+                <a:highlight>
+                  <a:schemeClr val="accent1"/>
+                </a:highlight>
+              </a:rPr>
+              <a:t> forEach()</a:t>
+            </a:r>
+            <a:r>
+              <a:rPr lang="en-GB"/>
+              <a:t> method to perform an action on each item."</a:t>
+            </a:r>
+            <a:endParaRPr lang="en-GB"/>
+          </a:p>
+          <a:p>
+            <a:pPr marL="0" lvl="0" indent="0" algn="l" rtl="0">
+              <a:spcBef>
+                <a:spcPts val="1200"/>
+              </a:spcBef>
+              <a:spcAft>
+                <a:spcPts val="1200"/>
+              </a:spcAft>
+              <a:buNone/>
+            </a:pPr>
+          </a:p>
+        </p:txBody>
+      </p:sp>
+    </p:spTree>
+  </p:cSld>
+  <p:clrMapOvr>
+    <a:masterClrMapping/>
+  </p:clrMapOvr>
+</p:sld>
+</file>
+
+<file path=ppt/slides/slide6.xml><?xml version="1.0" encoding="utf-8"?>
 <p:sld xmlns:a="http://schemas.openxmlformats.org/drawingml/2006/main" xmlns:r="http://schemas.openxmlformats.org/officeDocument/2006/relationships" xmlns:p="http://schemas.openxmlformats.org/presentationml/2006/main">
   <p:cSld>
     <p:spTree>
@@ -9241,10 +9569,10 @@
               <a:buNone/>
             </a:pPr>
             <a:r>
-              <a:rPr lang="en"/>
+              <a:rPr lang="en-GB"/>
               <a:t>Introduction to Objects</a:t>
             </a:r>
-            <a:endParaRPr/>
+            <a:endParaRPr lang="en-GB"/>
           </a:p>
         </p:txBody>
       </p:sp>
@@ -9283,11 +9611,11 @@
               <a:buNone/>
             </a:pPr>
             <a:r>
-              <a:rPr lang="en"/>
+              <a:rPr lang="en-GB"/>
               <a:t>Objects in JavaScript are collections of key-value pairs. Each key is unique, and the value can be of any type: </a:t>
             </a:r>
             <a:r>
-              <a:rPr lang="en">
+              <a:rPr lang="en-GB">
                 <a:solidFill>
                   <a:schemeClr val="lt1"/>
                 </a:solidFill>
@@ -9298,10 +9626,10 @@
               <a:t>string, number, array, or even another object</a:t>
             </a:r>
             <a:r>
-              <a:rPr lang="en"/>
+              <a:rPr lang="en-GB"/>
               <a:t>. Unlike arrays, which are ordered</a:t>
             </a:r>
-            <a:endParaRPr/>
+            <a:endParaRPr lang="en-GB"/>
           </a:p>
           <a:p>
             <a:pPr marL="0" lvl="0" indent="0" algn="l" rtl="0">
@@ -9314,10 +9642,10 @@
               <a:buNone/>
             </a:pPr>
             <a:r>
-              <a:rPr lang="en"/>
+              <a:rPr lang="en-GB"/>
               <a:t>JavaScript allows us to combine arrays and objects. For example, we can have an array of objects where each object represents an entity like a student, a product, or an employee.</a:t>
             </a:r>
-            <a:endParaRPr/>
+            <a:endParaRPr lang="en-GB"/>
           </a:p>
         </p:txBody>
       </p:sp>
@@ -9329,7 +9657,7 @@
 </p:sld>
 </file>
 
-<file path=ppt/slides/slide6.xml><?xml version="1.0" encoding="utf-8"?>
+<file path=ppt/slides/slide7.xml><?xml version="1.0" encoding="utf-8"?>
 <p:sld xmlns:a="http://schemas.openxmlformats.org/drawingml/2006/main" xmlns:r="http://schemas.openxmlformats.org/officeDocument/2006/relationships" xmlns:p="http://schemas.openxmlformats.org/presentationml/2006/main">
   <p:cSld>
     <p:spTree>
@@ -9381,11 +9709,11 @@
               <a:buNone/>
             </a:pPr>
             <a:r>
-              <a:rPr lang="en"/>
+              <a:rPr lang="en-GB"/>
               <a:t>Object name </a:t>
             </a:r>
             <a:r>
-              <a:rPr lang="en">
+              <a:rPr lang="en-GB">
                 <a:solidFill>
                   <a:srgbClr val="00FF00"/>
                 </a:solidFill>
@@ -9393,11 +9721,11 @@
               <a:t>Student</a:t>
             </a:r>
             <a:r>
-              <a:rPr lang="en"/>
+              <a:rPr lang="en-GB"/>
               <a:t>: </a:t>
             </a:r>
             <a:r>
-              <a:rPr lang="en">
+              <a:rPr lang="en-GB">
                 <a:solidFill>
                   <a:srgbClr val="FF0000"/>
                 </a:solidFill>
@@ -9405,11 +9733,11 @@
               <a:t>Keys</a:t>
             </a:r>
             <a:r>
-              <a:rPr lang="en"/>
+              <a:rPr lang="en-GB"/>
               <a:t>: </a:t>
             </a:r>
             <a:r>
-              <a:rPr lang="en">
+              <a:rPr lang="en-GB">
                 <a:solidFill>
                   <a:srgbClr val="0000FF"/>
                 </a:solidFill>
@@ -9459,11 +9787,11 @@
               <a:buNone/>
             </a:pPr>
             <a:r>
-              <a:rPr lang="en"/>
+              <a:rPr lang="en-GB"/>
               <a:t>let </a:t>
             </a:r>
             <a:r>
-              <a:rPr lang="en">
+              <a:rPr lang="en-GB">
                 <a:solidFill>
                   <a:srgbClr val="00FF00"/>
                 </a:solidFill>
@@ -9471,10 +9799,10 @@
               <a:t>student </a:t>
             </a:r>
             <a:r>
-              <a:rPr lang="en"/>
+              <a:rPr lang="en-GB"/>
               <a:t>= {</a:t>
             </a:r>
-            <a:endParaRPr/>
+            <a:endParaRPr lang="en-GB"/>
           </a:p>
           <a:p>
             <a:pPr marL="0" lvl="0" indent="0" algn="l" rtl="0">
@@ -9487,11 +9815,11 @@
               <a:buNone/>
             </a:pPr>
             <a:r>
-              <a:rPr lang="en"/>
+              <a:rPr lang="en-GB"/>
               <a:t>  </a:t>
             </a:r>
             <a:r>
-              <a:rPr lang="en">
+              <a:rPr lang="en-GB">
                 <a:solidFill>
                   <a:srgbClr val="FF0000"/>
                 </a:solidFill>
@@ -9499,11 +9827,11 @@
               <a:t>name</a:t>
             </a:r>
             <a:r>
-              <a:rPr lang="en"/>
+              <a:rPr lang="en-GB"/>
               <a:t>: </a:t>
             </a:r>
             <a:r>
-              <a:rPr lang="en">
+              <a:rPr lang="en-GB">
                 <a:solidFill>
                   <a:srgbClr val="0000FF"/>
                 </a:solidFill>
@@ -9511,10 +9839,10 @@
               <a:t>'John'</a:t>
             </a:r>
             <a:r>
-              <a:rPr lang="en"/>
+              <a:rPr lang="en-GB"/>
               <a:t>,</a:t>
             </a:r>
-            <a:endParaRPr/>
+            <a:endParaRPr lang="en-GB"/>
           </a:p>
           <a:p>
             <a:pPr marL="0" lvl="0" indent="0" algn="l" rtl="0">
@@ -9527,11 +9855,11 @@
               <a:buNone/>
             </a:pPr>
             <a:r>
-              <a:rPr lang="en"/>
+              <a:rPr lang="en-GB"/>
               <a:t>  </a:t>
             </a:r>
             <a:r>
-              <a:rPr lang="en">
+              <a:rPr lang="en-GB">
                 <a:solidFill>
                   <a:srgbClr val="FF0000"/>
                 </a:solidFill>
@@ -9539,11 +9867,11 @@
               <a:t>age</a:t>
             </a:r>
             <a:r>
-              <a:rPr lang="en"/>
+              <a:rPr lang="en-GB"/>
               <a:t>: </a:t>
             </a:r>
             <a:r>
-              <a:rPr lang="en">
+              <a:rPr lang="en-GB">
                 <a:solidFill>
                   <a:srgbClr val="0000FF"/>
                 </a:solidFill>
@@ -9551,10 +9879,10 @@
               <a:t>20</a:t>
             </a:r>
             <a:r>
-              <a:rPr lang="en"/>
+              <a:rPr lang="en-GB"/>
               <a:t>,</a:t>
             </a:r>
-            <a:endParaRPr/>
+            <a:endParaRPr lang="en-GB"/>
           </a:p>
           <a:p>
             <a:pPr marL="0" lvl="0" indent="0" algn="l" rtl="0">
@@ -9567,11 +9895,11 @@
               <a:buNone/>
             </a:pPr>
             <a:r>
-              <a:rPr lang="en"/>
+              <a:rPr lang="en-GB"/>
               <a:t>  </a:t>
             </a:r>
             <a:r>
-              <a:rPr lang="en">
+              <a:rPr lang="en-GB">
                 <a:solidFill>
                   <a:srgbClr val="FF0000"/>
                 </a:solidFill>
@@ -9579,11 +9907,11 @@
               <a:t>major</a:t>
             </a:r>
             <a:r>
-              <a:rPr lang="en"/>
+              <a:rPr lang="en-GB"/>
               <a:t>: '</a:t>
             </a:r>
             <a:r>
-              <a:rPr lang="en">
+              <a:rPr lang="en-GB">
                 <a:solidFill>
                   <a:srgbClr val="0000FF"/>
                 </a:solidFill>
@@ -9591,10 +9919,10 @@
               <a:t>Computer Science</a:t>
             </a:r>
             <a:r>
-              <a:rPr lang="en"/>
+              <a:rPr lang="en-GB"/>
               <a:t>'</a:t>
             </a:r>
-            <a:endParaRPr/>
+            <a:endParaRPr lang="en-GB"/>
           </a:p>
           <a:p>
             <a:pPr marL="0" lvl="0" indent="0" algn="l" rtl="0">
@@ -9607,10 +9935,10 @@
               <a:buNone/>
             </a:pPr>
             <a:r>
-              <a:rPr lang="en"/>
+              <a:rPr lang="en-GB"/>
               <a:t>};</a:t>
             </a:r>
-            <a:endParaRPr/>
+            <a:endParaRPr lang="en-GB"/>
           </a:p>
           <a:p>
             <a:pPr marL="0" lvl="0" indent="0" algn="l" rtl="0">
@@ -9622,7 +9950,6 @@
               </a:spcAft>
               <a:buNone/>
             </a:pPr>
-            <a:endParaRPr/>
           </a:p>
         </p:txBody>
       </p:sp>
@@ -9634,7 +9961,7 @@
 </p:sld>
 </file>
 
-<file path=ppt/slides/slide7.xml><?xml version="1.0" encoding="utf-8"?>
+<file path=ppt/slides/slide8.xml><?xml version="1.0" encoding="utf-8"?>
 <p:sld xmlns:a="http://schemas.openxmlformats.org/drawingml/2006/main" xmlns:r="http://schemas.openxmlformats.org/officeDocument/2006/relationships" xmlns:p="http://schemas.openxmlformats.org/presentationml/2006/main">
   <p:cSld>
     <p:spTree>
@@ -9686,10 +10013,10 @@
               <a:buNone/>
             </a:pPr>
             <a:r>
-              <a:rPr lang="en"/>
+              <a:rPr lang="en-GB"/>
               <a:t>Accessing Object Properties</a:t>
             </a:r>
-            <a:endParaRPr/>
+            <a:endParaRPr lang="en-GB"/>
           </a:p>
         </p:txBody>
       </p:sp>
@@ -9728,34 +10055,34 @@
               <a:buNone/>
             </a:pPr>
             <a:r>
-              <a:rPr lang="en" sz="1100" b="1">
+              <a:rPr lang="en-GB" sz="1100" b="1">
                 <a:solidFill>
                   <a:srgbClr val="000000"/>
                 </a:solidFill>
-                <a:latin typeface="Arial"/>
-                <a:ea typeface="Arial"/>
-                <a:cs typeface="Arial"/>
-                <a:sym typeface="Arial"/>
+                <a:latin typeface="Arial" panose="020B0604020202020204"/>
+                <a:ea typeface="Arial" panose="020B0604020202020204"/>
+                <a:cs typeface="Arial" panose="020B0604020202020204"/>
+                <a:sym typeface="Arial" panose="020B0604020202020204"/>
               </a:rPr>
               <a:t>Dot notation</a:t>
             </a:r>
             <a:r>
-              <a:rPr lang="en" sz="1100">
+              <a:rPr lang="en-GB" sz="1100">
                 <a:solidFill>
                   <a:srgbClr val="000000"/>
                 </a:solidFill>
-                <a:latin typeface="Arial"/>
-                <a:ea typeface="Arial"/>
-                <a:cs typeface="Arial"/>
-                <a:sym typeface="Arial"/>
+                <a:latin typeface="Arial" panose="020B0604020202020204"/>
+                <a:ea typeface="Arial" panose="020B0604020202020204"/>
+                <a:cs typeface="Arial" panose="020B0604020202020204"/>
+                <a:sym typeface="Arial" panose="020B0604020202020204"/>
               </a:rPr>
               <a:t>:: </a:t>
             </a:r>
             <a:r>
-              <a:rPr lang="en"/>
+              <a:rPr lang="en-GB"/>
               <a:t>console.log(student.name);                   // Output: John</a:t>
             </a:r>
-            <a:endParaRPr/>
+            <a:endParaRPr lang="en-GB"/>
           </a:p>
           <a:p>
             <a:pPr marL="0" lvl="0" indent="0" algn="l" rtl="0">
@@ -9767,7 +10094,6 @@
               </a:spcAft>
               <a:buNone/>
             </a:pPr>
-            <a:endParaRPr/>
           </a:p>
           <a:p>
             <a:pPr marL="0" lvl="0" indent="0" algn="l" rtl="0">
@@ -9780,14 +10106,14 @@
               <a:buNone/>
             </a:pPr>
             <a:r>
-              <a:rPr lang="en" b="1"/>
+              <a:rPr lang="en-GB" b="1"/>
               <a:t>Bracket notation:: </a:t>
             </a:r>
             <a:r>
-              <a:rPr lang="en"/>
+              <a:rPr lang="en-GB"/>
               <a:t>console.log(student['age']); // Output: 20</a:t>
             </a:r>
-            <a:endParaRPr/>
+            <a:endParaRPr lang="en-GB"/>
           </a:p>
         </p:txBody>
       </p:sp>
@@ -9799,7 +10125,7 @@
 </p:sld>
 </file>
 
-<file path=ppt/slides/slide8.xml><?xml version="1.0" encoding="utf-8"?>
+<file path=ppt/slides/slide9.xml><?xml version="1.0" encoding="utf-8"?>
 <p:sld xmlns:a="http://schemas.openxmlformats.org/drawingml/2006/main" xmlns:r="http://schemas.openxmlformats.org/officeDocument/2006/relationships" xmlns:p="http://schemas.openxmlformats.org/presentationml/2006/main">
   <p:cSld>
     <p:spTree>
@@ -9851,10 +10177,10 @@
               <a:buNone/>
             </a:pPr>
             <a:r>
-              <a:rPr lang="en"/>
+              <a:rPr lang="en-GB"/>
               <a:t> Adding or Updating Object Properties</a:t>
             </a:r>
-            <a:endParaRPr/>
+            <a:endParaRPr lang="en-GB"/>
           </a:p>
         </p:txBody>
       </p:sp>
@@ -9893,10 +10219,10 @@
               <a:buNone/>
             </a:pPr>
             <a:r>
-              <a:rPr lang="en"/>
+              <a:rPr lang="en-GB"/>
               <a:t>Adding//</a:t>
             </a:r>
-            <a:endParaRPr/>
+            <a:endParaRPr lang="en-GB"/>
           </a:p>
           <a:p>
             <a:pPr marL="0" lvl="0" indent="0" algn="l" rtl="0">
@@ -9909,7 +10235,7 @@
               <a:buNone/>
             </a:pPr>
             <a:r>
-              <a:rPr lang="en">
+              <a:rPr lang="en-GB">
                 <a:solidFill>
                   <a:schemeClr val="dk2"/>
                 </a:solidFill>
@@ -9933,7 +10259,7 @@
               <a:buNone/>
             </a:pPr>
             <a:r>
-              <a:rPr lang="en">
+              <a:rPr lang="en-GB">
                 <a:solidFill>
                   <a:schemeClr val="dk2"/>
                 </a:solidFill>
@@ -9957,10 +10283,10 @@
               <a:buNone/>
             </a:pPr>
             <a:r>
-              <a:rPr lang="en"/>
+              <a:rPr lang="en-GB"/>
               <a:t>Upading//</a:t>
             </a:r>
-            <a:endParaRPr/>
+            <a:endParaRPr lang="en-GB"/>
           </a:p>
           <a:p>
             <a:pPr marL="0" lvl="0" indent="0" algn="l" rtl="0">
@@ -9973,7 +10299,7 @@
               <a:buNone/>
             </a:pPr>
             <a:r>
-              <a:rPr lang="en">
+              <a:rPr lang="en-GB">
                 <a:solidFill>
                   <a:schemeClr val="dk2"/>
                 </a:solidFill>
@@ -9997,7 +10323,7 @@
               <a:buNone/>
             </a:pPr>
             <a:r>
-              <a:rPr lang="en">
+              <a:rPr lang="en-GB">
                 <a:solidFill>
                   <a:schemeClr val="dk2"/>
                 </a:solidFill>
@@ -10009,159 +10335,6 @@
                 <a:schemeClr val="dk2"/>
               </a:solidFill>
             </a:endParaRPr>
-          </a:p>
-        </p:txBody>
-      </p:sp>
-    </p:spTree>
-  </p:cSld>
-  <p:clrMapOvr>
-    <a:masterClrMapping/>
-  </p:clrMapOvr>
-</p:sld>
-</file>
-
-<file path=ppt/slides/slide9.xml><?xml version="1.0" encoding="utf-8"?>
-<p:sld xmlns:a="http://schemas.openxmlformats.org/drawingml/2006/main" xmlns:r="http://schemas.openxmlformats.org/officeDocument/2006/relationships" xmlns:p="http://schemas.openxmlformats.org/presentationml/2006/main">
-  <p:cSld>
-    <p:spTree>
-      <p:nvGrpSpPr>
-        <p:cNvPr id="1" name="Shape 133"/>
-        <p:cNvGrpSpPr/>
-        <p:nvPr/>
-      </p:nvGrpSpPr>
-      <p:grpSpPr>
-        <a:xfrm>
-          <a:off x="0" y="0"/>
-          <a:ext cx="0" cy="0"/>
-          <a:chOff x="0" y="0"/>
-          <a:chExt cx="0" cy="0"/>
-        </a:xfrm>
-      </p:grpSpPr>
-      <p:sp>
-        <p:nvSpPr>
-          <p:cNvPr id="134" name="Google Shape;134;p21"/>
-          <p:cNvSpPr txBox="1">
-            <a:spLocks noGrp="1"/>
-          </p:cNvSpPr>
-          <p:nvPr>
-            <p:ph type="title"/>
-          </p:nvPr>
-        </p:nvSpPr>
-        <p:spPr>
-          <a:xfrm>
-            <a:off x="729450" y="1318650"/>
-            <a:ext cx="7688700" cy="535200"/>
-          </a:xfrm>
-          <a:prstGeom prst="rect">
-            <a:avLst/>
-          </a:prstGeom>
-        </p:spPr>
-        <p:txBody>
-          <a:bodyPr spcFirstLastPara="1" wrap="square" lIns="91425" tIns="91425" rIns="91425" bIns="91425" anchor="t" anchorCtr="0">
-            <a:normAutofit fontScale="90000"/>
-          </a:bodyPr>
-          <a:lstStyle/>
-          <a:p>
-            <a:pPr marL="0" lvl="0" indent="0" algn="l" rtl="0">
-              <a:spcBef>
-                <a:spcPts val="0"/>
-              </a:spcBef>
-              <a:spcAft>
-                <a:spcPts val="0"/>
-              </a:spcAft>
-              <a:buNone/>
-            </a:pPr>
-            <a:r>
-              <a:rPr lang="en"/>
-              <a:t>Looping Through Objects	</a:t>
-            </a:r>
-            <a:endParaRPr/>
-          </a:p>
-        </p:txBody>
-      </p:sp>
-      <p:sp>
-        <p:nvSpPr>
-          <p:cNvPr id="135" name="Google Shape;135;p21"/>
-          <p:cNvSpPr txBox="1">
-            <a:spLocks noGrp="1"/>
-          </p:cNvSpPr>
-          <p:nvPr>
-            <p:ph type="body" idx="1"/>
-          </p:nvPr>
-        </p:nvSpPr>
-        <p:spPr>
-          <a:xfrm>
-            <a:off x="729450" y="2078875"/>
-            <a:ext cx="7688700" cy="2261100"/>
-          </a:xfrm>
-          <a:prstGeom prst="rect">
-            <a:avLst/>
-          </a:prstGeom>
-        </p:spPr>
-        <p:txBody>
-          <a:bodyPr spcFirstLastPara="1" wrap="square" lIns="91425" tIns="91425" rIns="91425" bIns="91425" anchor="t" anchorCtr="0">
-            <a:normAutofit/>
-          </a:bodyPr>
-          <a:lstStyle/>
-          <a:p>
-            <a:pPr marL="0" lvl="0" indent="0" algn="l" rtl="0">
-              <a:spcBef>
-                <a:spcPts val="0"/>
-              </a:spcBef>
-              <a:spcAft>
-                <a:spcPts val="0"/>
-              </a:spcAft>
-              <a:buNone/>
-            </a:pPr>
-            <a:r>
-              <a:rPr lang="en"/>
-              <a:t>for (let key in student) {</a:t>
-            </a:r>
-            <a:endParaRPr/>
-          </a:p>
-          <a:p>
-            <a:pPr marL="0" lvl="0" indent="0" algn="l" rtl="0">
-              <a:spcBef>
-                <a:spcPts val="1200"/>
-              </a:spcBef>
-              <a:spcAft>
-                <a:spcPts val="0"/>
-              </a:spcAft>
-              <a:buNone/>
-            </a:pPr>
-            <a:r>
-              <a:rPr lang="en"/>
-              <a:t>  console.log(key + ": " + student[key]);</a:t>
-            </a:r>
-            <a:endParaRPr/>
-          </a:p>
-          <a:p>
-            <a:pPr marL="0" lvl="0" indent="0" algn="l" rtl="0">
-              <a:spcBef>
-                <a:spcPts val="1200"/>
-              </a:spcBef>
-              <a:spcAft>
-                <a:spcPts val="0"/>
-              </a:spcAft>
-              <a:buNone/>
-            </a:pPr>
-            <a:r>
-              <a:rPr lang="en"/>
-              <a:t>}</a:t>
-            </a:r>
-            <a:endParaRPr/>
-          </a:p>
-          <a:p>
-            <a:pPr marL="0" lvl="0" indent="0" algn="l" rtl="0">
-              <a:spcBef>
-                <a:spcPts val="1200"/>
-              </a:spcBef>
-              <a:spcAft>
-                <a:spcPts val="1200"/>
-              </a:spcAft>
-              <a:buNone/>
-            </a:pPr>
-            <a:endParaRPr/>
           </a:p>
         </p:txBody>
       </p:sp>
@@ -10449,8 +10622,11 @@
       </a:bgFillStyleLst>
     </a:fmtScheme>
   </a:themeElements>
-  <a:objectDefaults/>
-  <a:extraClrSchemeLst/>
+  <a:extLst>
+    <a:ext uri="{05A4C25C-085E-4340-85A3-A5531E510DB2}">
+      <thm15:themeFamily xmlns:thm15="http://schemas.microsoft.com/office/thememl/2012/main" name="Office Theme" id="{62F939B6-93AF-4DB8-9C6B-D6C7DFDC589F}" vid="{4A3C46E8-61CC-4603-A589-7422A47A8E4A}"/>
+    </a:ext>
+  </a:extLst>
 </a:theme>
 </file>
 
@@ -10730,7 +10906,10 @@
       </a:bgFillStyleLst>
     </a:fmtScheme>
   </a:themeElements>
-  <a:objectDefaults/>
-  <a:extraClrSchemeLst/>
+  <a:extLst>
+    <a:ext uri="{05A4C25C-085E-4340-85A3-A5531E510DB2}">
+      <thm15:themeFamily xmlns:thm15="http://schemas.microsoft.com/office/thememl/2012/main" name="Office Theme" id="{62F939B6-93AF-4DB8-9C6B-D6C7DFDC589F}" vid="{4A3C46E8-61CC-4603-A589-7422A47A8E4A}"/>
+    </a:ext>
+  </a:extLst>
 </a:theme>
 </file>